--- a/it/slides/07-Architettura_dei_Calcolatori-Verm1_Parte_1-Codice.pptx
+++ b/it/slides/07-Architettura_dei_Calcolatori-Verm1_Parte_1-Codice.pptx
@@ -124,27 +124,39 @@
   <p:extLst>
     <p:ext uri="{521415D9-36F7-43E2-AB2F-B90AF26B5E84}">
       <p14:sectionLst xmlns:p14="http://schemas.microsoft.com/office/powerpoint/2010/main">
-        <p14:section name="Apertura" id="{ab0b9c03-c652-a958-ec69-ce586bfce3e6}">
+        <p14:section name="Apertura" id="{69b5a20a-9ee9-9795-a352-db974440b4a3}">
           <p14:sldIdLst>
             <p14:sldId id="256"/>
             <p14:sldId id="257"/>
           </p14:sldIdLst>
         </p14:section>
-        <p14:section name="I listati" id="{91f71af5-9363-4d87-900e-a196f7a1396c}">
+        <p14:section name="Passo 0: il ciclo di lavoro" id="{b9d567ca-4cdd-a9eb-dfc7-020484c753d1}">
           <p14:sldIdLst>
             <p14:sldId id="258"/>
             <p14:sldId id="259"/>
+          </p14:sldIdLst>
+        </p14:section>
+        <p14:section name="Passo 2: una griglia e una testa" id="{a162e804-36ce-f5d6-5357-9b7a66219f37}">
+          <p14:sldIdLst>
             <p14:sldId id="260"/>
             <p14:sldId id="261"/>
             <p14:sldId id="262"/>
             <p14:sldId id="263"/>
             <p14:sldId id="264"/>
+          </p14:sldIdLst>
+        </p14:section>
+        <p14:section name="Passo 3: il movimento" id="{f57f6328-ae80-a784-1f73-f0e927e5cd31}">
+          <p14:sldIdLst>
             <p14:sldId id="265"/>
             <p14:sldId id="266"/>
+          </p14:sldIdLst>
+        </p14:section>
+        <p14:section name="Passo 4: guardare dentro con PRG32-QT" id="{dac43909-3c07-37fc-e011-fad145acabb2}">
+          <p14:sldIdLst>
             <p14:sldId id="267"/>
           </p14:sldIdLst>
         </p14:section>
-        <p14:section name="Eseguire e provare" id="{12f18f0c-9e33-23ca-2883-11b3a7f6105c}">
+        <p14:section name="Eseguire e provare" id="{d850748c-a3ed-7522-2c05-bb6970c81f2c}">
           <p14:sldIdLst>
             <p14:sldId id="268"/>
             <p14:sldId id="269"/>
@@ -153,7 +165,7 @@
             <p14:sldId id="272"/>
           </p14:sldIdLst>
         </p14:section>
-        <p14:section name="Esercizi" id="{ce697a6f-f6ac-6125-02ce-9ba52fd4d0e1}">
+        <p14:section name="Esercizi" id="{70c85097-1bd7-68f9-89c0-7c3df66656a2}">
           <p14:sldIdLst>
             <p14:sldId id="273"/>
           </p14:sldIdLst>
@@ -3087,7 +3099,63 @@
       </p:sp>
       <p:sp>
         <p:nvSpPr>
-          <p:cNvPr id="12" name="Shape 10"/>
+          <p:cNvPr id="12" name="Text 10"/>
+          <p:cNvSpPr txBox="1"/>
+          <p:nvPr/>
+        </p:nvSpPr>
+        <p:spPr>
+          <a:xfrm>
+            <a:off x="4693615" y="566928"/>
+            <a:ext cx="6949440" cy="640080"/>
+          </a:xfrm>
+          <a:prstGeom prst="rect">
+            <a:avLst/>
+          </a:prstGeom>
+          <a:noFill/>
+          <a:ln/>
+        </p:spPr>
+        <p:txBody>
+          <a:bodyPr wrap="square" lIns="0" tIns="0" rIns="0" bIns="0" rtlCol="0" anchor="t"/>
+          <a:lstStyle/>
+          <a:p>
+            <a:pPr algn="r" indent="0" marL="0">
+              <a:buNone/>
+            </a:pPr>
+            <a:r>
+              <a:rPr lang="en-US" sz="1300" dirty="0">
+                <a:solidFill>
+                  <a:srgbClr val="CFE3EA"/>
+                </a:solidFill>
+                <a:latin typeface="Calibri" pitchFamily="34" charset="0"/>
+                <a:ea typeface="Calibri" pitchFamily="34" charset="-122"/>
+                <a:cs typeface="Calibri" pitchFamily="34" charset="-120"/>
+              </a:rPr>
+              <a:t>Presentazione del codice. I concetti, le figure e le domande sono nella presentazione della lezione:</a:t>
+            </a:r>
+            <a:endParaRPr lang="en-US" sz="1300" dirty="0"/>
+          </a:p>
+          <a:p>
+            <a:pPr algn="r" indent="0" marL="0">
+              <a:buNone/>
+            </a:pPr>
+            <a:r>
+              <a:rPr lang="en-US" sz="1300" dirty="0">
+                <a:solidFill>
+                  <a:srgbClr val="CFE3EA"/>
+                </a:solidFill>
+                <a:latin typeface="Calibri" pitchFamily="34" charset="0"/>
+                <a:ea typeface="Calibri" pitchFamily="34" charset="-122"/>
+                <a:cs typeface="Calibri" pitchFamily="34" charset="-120"/>
+              </a:rPr>
+              <a:t>07-Architettura_dei_Calcolatori-Verm1_Parte_1.pptx</a:t>
+            </a:r>
+            <a:endParaRPr lang="en-US" sz="1300" dirty="0"/>
+          </a:p>
+        </p:txBody>
+      </p:sp>
+      <p:sp>
+        <p:nvSpPr>
+          <p:cNvPr id="13" name="Shape 11"/>
           <p:cNvSpPr/>
           <p:nvPr/>
         </p:nvSpPr>
@@ -3114,7 +3182,7 @@
       </p:sp>
       <p:pic>
         <p:nvPicPr>
-          <p:cNvPr id="13" name="Image 0" descr="/Users/raffaelemontella/devel/riscv-prg32/computer-architecture-with-prg32/tools/assets/verm1_p1.png">    </p:cNvPr>
+          <p:cNvPr id="14" name="Image 0" descr="/Users/raffaelemontella/devel/riscv-prg32/computer-architecture-with-prg32/tools/assets/verm1_p1.png">    </p:cNvPr>
           <p:cNvPicPr>
             <a:picLocks noChangeAspect="1"/>
           </p:cNvPicPr>

--- a/it/slides/07-Architettura_dei_Calcolatori-Verm1_Parte_1-Codice.pptx
+++ b/it/slides/07-Architettura_dei_Calcolatori-Verm1_Parte_1-Codice.pptx
@@ -124,19 +124,19 @@
   <p:extLst>
     <p:ext uri="{521415D9-36F7-43E2-AB2F-B90AF26B5E84}">
       <p14:sectionLst xmlns:p14="http://schemas.microsoft.com/office/powerpoint/2010/main">
-        <p14:section name="Apertura" id="{69b5a20a-9ee9-9795-a352-db974440b4a3}">
+        <p14:section name="Apertura" id="{f1329aec-7d79-4ecf-519c-200cfb47562c}">
           <p14:sldIdLst>
             <p14:sldId id="256"/>
             <p14:sldId id="257"/>
           </p14:sldIdLst>
         </p14:section>
-        <p14:section name="Passo 0: il ciclo di lavoro" id="{b9d567ca-4cdd-a9eb-dfc7-020484c753d1}">
+        <p14:section name="Passo 0: il ciclo di lavoro" id="{5ad64092-96dd-c390-51f9-627f81469efe}">
           <p14:sldIdLst>
             <p14:sldId id="258"/>
             <p14:sldId id="259"/>
           </p14:sldIdLst>
         </p14:section>
-        <p14:section name="Passo 2: una griglia e una testa" id="{a162e804-36ce-f5d6-5357-9b7a66219f37}">
+        <p14:section name="Passo 2: una griglia e una testa" id="{2a922ae9-cd33-b17e-80cb-9b62f29b2a6b}">
           <p14:sldIdLst>
             <p14:sldId id="260"/>
             <p14:sldId id="261"/>
@@ -145,18 +145,18 @@
             <p14:sldId id="264"/>
           </p14:sldIdLst>
         </p14:section>
-        <p14:section name="Passo 3: il movimento" id="{f57f6328-ae80-a784-1f73-f0e927e5cd31}">
+        <p14:section name="Passo 3: il movimento" id="{e5b95d1d-f38a-c66f-5ded-5b0ddb129773}">
           <p14:sldIdLst>
             <p14:sldId id="265"/>
             <p14:sldId id="266"/>
           </p14:sldIdLst>
         </p14:section>
-        <p14:section name="Passo 4: guardare dentro con PRG32-QT" id="{dac43909-3c07-37fc-e011-fad145acabb2}">
+        <p14:section name="Passo 4: guardare dentro con PRG32-QT" id="{796ad78c-6628-a157-365e-70eabfe06084}">
           <p14:sldIdLst>
             <p14:sldId id="267"/>
           </p14:sldIdLst>
         </p14:section>
-        <p14:section name="Eseguire e provare" id="{d850748c-a3ed-7522-2c05-bb6970c81f2c}">
+        <p14:section name="Eseguire e provare" id="{fcd2d4c4-fbaa-9207-7f35-88143e2d5f59}">
           <p14:sldIdLst>
             <p14:sldId id="268"/>
             <p14:sldId id="269"/>
@@ -165,7 +165,7 @@
             <p14:sldId id="272"/>
           </p14:sldIdLst>
         </p14:section>
-        <p14:section name="Esercizi" id="{70c85097-1bd7-68f9-89c0-7c3df66656a2}">
+        <p14:section name="Esercizi" id="{2664d5f6-9f4f-4c33-7fe0-256c18e6ed2e}">
           <p14:sldIdLst>
             <p14:sldId id="273"/>
           </p14:sldIdLst>
@@ -574,7 +574,9 @@
           <a:p>
             <a:r>
               <a:rPr lang="en-US" dirty="0"/>
-              <a:t>Questa è la presentazione del codice della Lezione 07. La presentazione della lezione contiene i concetti; questa contiene tutto ciò che si scrive e si esegue: i listati con la loro spiegazione, il programma completo, che cosa mostra, e il modo di provarlo su ciascuno dei tre host.</a:t>
+              <a:t>Questa è la presentazione del codice della Lezione 07. La presentazione della lezione contiene i concetti; questa contiene tutto ciò che si scrive e si esegue: i listati con la loro spiegazione, il programma completo, che cosa mostra, e il modo di provarlo su ciascuno dei tre host.
+Stato di apprendimento: DA COMPRENDERE OGGI, alla fine di questa lezione lo spiegate, lo seguite passo passo e lo applicate da soli; DA UTILIZZARE OGGI, oggi seguite e usate la ricetta; come funziona dentro si spiega più avanti, o non fa parte del corso; DA COMPRENDERE PIÙ AVANTI, riconoscete il nome e lo scopo; lo spiega una lezione successiva. Una slide senza etichetta è contesto: una storia, un esempio, una domanda, un esercizio.
+Stato di apprendimento di questa lezione. DA COMPRENDERE OGGI: il progetto Verm1; contratto init/update/draw; un colore è un numero; gli array in memoria; .text, .rodata, .data; indirizzo, valore, load, store; perché si salva ra; shift come moltiplicazione; la virgola fissa; le pseudo-istruzioni; l'ordine little-endian. DA UTILIZZARE OGGI: gli strumenti di PRG32, il debugger di PRG32-QT (si usa, non si studia, in questo corso). DA COMPRENDERE PIÙ AVANTI: formati delle istruzioni (Lezione 19). Una slide senza etichetta è contesto: una storia, un esempio, una domanda, un esercizio.</a:t>
             </a:r>
             <a:endParaRPr lang="en-US" dirty="0"/>
           </a:p>
@@ -663,6 +665,7 @@
             <a:r>
               <a:rPr lang="en-US" dirty="0"/>
               <a:t>Leggete verm1_update in due metà. Prima il timer: si carica step_q8, si somma la velocità, si confronta con 256. Se è minore si salta all'etichetta 2, si memorizza la frazione e si ritorna: in questo frame nulla si muove. Altrimenti si sottrae 256, tenendo il resto, e lo si memorizza. Poi il passo: si carica head_x, si somma 1, si confronta con COLS; se la colonna è arrivata a 40 diventa 0, e la testa rientra da sinistra. Le etichette 1: e 2: sono etichette locali: 1f significa «la prossima etichetta 1 in avanti».
+DA COMPRENDERE OGGI: la virgola fissa.
 Per il docente: blt confronta numeri con segno, e qui va bene: tutti i valori sono piccoli e positivi. Le etichette locali 1: e 2: si richiamano con 1f e 2f, «il prossimo 1 o 2 in avanti».</a:t>
             </a:r>
             <a:endParaRPr lang="en-US" dirty="0"/>
@@ -841,6 +844,7 @@
             <a:r>
               <a:rPr lang="en-US" dirty="0"/>
               <a:t>Il debugger non mostra il vostro sorgente: mostra ciò che l'assemblatore ha prodotto. I nomi sono spariti: le etichette sono diventate indirizzi e SPEED_Q8 è diventato il numero 40. Le pseudo-istruzioni sono espanse: la è auipc seguita da addi, li è una addi da zero, ret è un salto a ra. Alcune istruzioni cominciano con c.: sono le forme compresse, a 16 bit, delle stesse istruzioni, la C di RV32IMAC. Riconoscere il proprio programma in questo listato è un'abilità che cresce con la pratica.
+DA COMPRENDERE OGGI: le pseudo-istruzioni. DA COMPRENDERE PIÙ AVANTI: formati delle istruzioni (si studia nella Lezione 19).
 Per il docente: Disassemblato di verm1_update da verm1/verm1_part1.S (objdump, rv32imac), abbreviato; gli scostamenti esatti dipendono dalla compilazione. Formati delle istruzioni e istruzioni compresse sono l'argomento della Lezione 19.</a:t>
             </a:r>
             <a:endParaRPr lang="en-US" dirty="0"/>
@@ -1019,6 +1023,7 @@
             <a:r>
               <a:rPr lang="en-US" dirty="0"/>
               <a:t>La via più rapida: PRG32-QT sul vostro computer. Quattro passi, ciascuno con il suo comando. PRG32-QT si comporta come una scheda sulla porta 8080, ed è per questo che il comando di caricamento dice esp32c6. Con la modalità debug abilitata potete fermarvi su qualsiasi istruzione e leggere registri e memoria.
+DA UTILIZZARE OGGI: gli strumenti di PRG32 (si usa, non si studia, in questo corso).
 Per il docente: Eseguito dai test: la cartuccia di questa slide è compilata con questo comando ed eseguita sull'esecutore senza interfaccia di PRG32-QT. Senza la toolchain: importate il file .prg32 in PRG32-QT e scegliete Run Cartridge. Tasti: frecce o WASD per il joystick, Z o J per A, X o K per B, Invio per Start, Esc per tornare a Setup.</a:t>
             </a:r>
             <a:endParaRPr lang="en-US" dirty="0"/>
@@ -1108,6 +1113,7 @@
             <a:r>
               <a:rPr lang="en-US" dirty="0"/>
               <a:t>Lo stesso programma sull'emulatore. QEMU esegue il firmware vero su un chip emulato, quindi la cartuccia va compilata per l'architettura qemu. Caricate la cartuccia mentre QEMU è chiuso. Il firmware si apre sul menu Setup: scegliete Run Cartridge e lo slot. Ricordate che la tastiera è letta dal terminale, non dalla finestra con l'immagine.
+DA UTILIZZARE OGGI: gli strumenti di PRG32 (si usa, non si studia, in questo corso).
 Per il docente: Verificato dai test fino al caricamento: la cartuccia è compilata per l'architettura qemu e accettata nell'immagine flash dell'emulatore. Ciò che l'emulatore poi mostra non è verificato automaticamente: il QEMU di Espressif ha bisogno della sua finestra. Dall'ottobre 2026 il firmware parte da Setup: scegliete Run Cartridge, poi cart0.</a:t>
             </a:r>
             <a:endParaRPr lang="en-US" dirty="0"/>
@@ -1197,6 +1203,7 @@
             <a:r>
               <a:rPr lang="en-US" dirty="0"/>
               <a:t>Lo stesso programma sul kit. Il firmware si scrive una volta, via USB; dopo, le cartucce viaggiano sul Wi-Fi. Il comando di caricamento è quello usato per PRG32-QT con l'indirizzo della scheda. È l'unico host che i test automatici non eseguono: provatelo, e riferite ciò che vedete.
+DA UTILIZZARE OGGI: gli strumenti di PRG32 (si usa, non si studia, in questo corso).
 Per il docente: Non eseguito dai test: sulla macchina di prova non c'è una scheda. La cartuccia per l'architettura esp32c6 è compilata dai test; i passi sono quelli della documentazione di PRG32. Se la porta seriale non viene trovata, passatela esplicitamente. Per usare il Wi-Fi dell'aula: python3 -m prg32 wifi set --ssid NOME --password PASSWORD --mode sta.</a:t>
             </a:r>
             <a:endParaRPr lang="en-US" dirty="0"/>
@@ -1286,6 +1293,7 @@
             <a:r>
               <a:rPr lang="en-US" dirty="0"/>
               <a:t>I cinque sintomi più comuni, che cosa significa ciascuno, e che cosa fare. Leggete il messaggio prima di cambiare qualcosa: quasi sempre nomina la causa.
+DA UTILIZZARE OGGI: gli strumenti di PRG32 (si usa, non si studia, in questo corso).
 Per il docente: Le prime tre righe coprono la maggior parte dei casi. Quando chiedete aiuto, incollate il comando e l'intero messaggio come testo. docs/usage/troubleshooting.md del repository di PRG32 ha l'elenco completo.</a:t>
             </a:r>
             <a:endParaRPr lang="en-US" dirty="0"/>
@@ -1553,6 +1561,7 @@
             <a:r>
               <a:rPr lang="en-US" dirty="0"/>
               <a:t>Create nella vostra home una cartella verm1 e tenetevi un solo file, verm1.S, che crescerà di parte in parte. Il primo comando compila la cartuccia; il secondo la invia a PRG32-QT in esecuzione sullo stesso computer e la avvia. Questi due comandi sono identici in ogni tutorial. Se localhost non risponde, usate l'indirizzo mostrato nella schermata Setup di PRG32-QT. In alternativa si può importare il file dal menu di PRG32-QT.
+DA UTILIZZARE OGGI: gli strumenti di PRG32 (si usa, non si studia, in questo corso).
 Per il docente: Create una cartella ~/verm1 e tenetevi un solo file, verm1.S, che cresce di parte in parte. PRG32-QT ascolta sulla porta 8080 e mostra il proprio indirizzo nella schermata Setup: usate quello se localhost non risponde. La stessa cartuccia gira su QEMU (python3 -m prg32 qemu upload, poi qemu run) e sulla scheda (--url http://192.168.4.1).</a:t>
             </a:r>
             <a:endParaRPr lang="en-US" dirty="0"/>
@@ -1642,6 +1651,7 @@
             <a:r>
               <a:rPr lang="en-US" dirty="0"/>
               <a:t>Il passo 1 è lo scheletro della Lezione 02 con il prefisso verm1: tre etichette globali e tre funzioni che ritornano e basta. Scrivetelo, compilatelo, eseguitelo. Il risultato giusto è uno schermo nero: dimostra che gli strumenti funzionano e che il firmware trova le vostre funzioni. Se qui la compilazione fallisce il problema è l'installazione, non il programma, e va risolto prima di proseguire. L'ultima nota è la regola di tutto il progetto: aggiungere una cosa, eseguire, guardare. Mai due cose insieme.
+DA COMPRENDERE OGGI: contratto init/update/draw.
 Per il docente: Lo scheletro della Lezione 02. Se qui la compilazione fallisce il problema è l'installazione, non il programma: va risolto prima di proseguire.</a:t>
             </a:r>
             <a:endParaRPr lang="en-US" dirty="0"/>
@@ -1731,6 +1741,7 @@
             <a:r>
               <a:rPr lang="en-US" dirty="0"/>
               <a:t>Queste righe sostituiscono l'inizio dello scheletro. Ogni .equ dà un nome a un numero e non usa memoria: l'assemblatore sostituisce semplicemente il numero. Tre colori in RGB565. Poi la geometria: una cella è di 8 per 8 pixel, quindi i 320 pixel di larghezza contengono 40 colonne; gli 8 pixel in alto sono riservati al titolo, e i 192 restanti contengono 24 righe. SPEED_Q8 è la velocità in virgola fissa e si userà nel passo 3. Le costanti con un nome rendono il programma leggibile e facile da modificare.
+DA COMPRENDERE OGGI: un colore è un numero.
 Per il docente: Sostituite con queste le prime righe dello scheletro. SPEED_Q8 si usa nel passo 3.</a:t>
             </a:r>
             <a:endParaRPr lang="en-US" dirty="0"/>
@@ -1820,6 +1831,7 @@
             <a:r>
               <a:rPr lang="en-US" dirty="0"/>
               <a:t>Questo va in fondo al file. La sezione .rodata contiene ciò che non cambia mai: il titolo, una stringa che .asciz termina con un byte a zero. La sezione .data contiene le variabili, una parola di 32 bit ciascuna: la colonna della testa, la sua riga, e la frazione di passo accumulata finora. I valori iniziali scritti qui sono solo un punto di partenza: init li imposterà di nuovo in modo esplicito.
+DA COMPRENDERE OGGI: .text, .rodata, .data.
 Per il docente: Mettete questo in fondo al file. step_q8 si usa nel passo 3.</a:t>
             </a:r>
             <a:endParaRPr lang="en-US" dirty="0"/>
@@ -1908,7 +1920,8 @@
           <a:p>
             <a:r>
               <a:rPr lang="en-US" dirty="0"/>
-              <a:t>verm1_init mette la testa al suo posto. Per ogni variabile lo schema è lo stesso: la carica l'indirizzo, li carica il valore, sw memorizza il valore all'indirizzo. La frazione step_q8 si azzera memorizzando direttamente il registro zero. La funzione non chiama nulla, quindi è una foglia e non le serve un frame di stack. Perché impostare valori che .data contiene già? Perché init può essere chiamata di nuovo per ricominciare la partita: mai fidarsi di ciò che la memoria conteneva.</a:t>
+              <a:t>verm1_init mette la testa al suo posto. Per ogni variabile lo schema è lo stesso: la carica l'indirizzo, li carica il valore, sw memorizza il valore all'indirizzo. La frazione step_q8 si azzera memorizzando direttamente il registro zero. La funzione non chiama nulla, quindi è una foglia e non le serve un frame di stack. Perché impostare valori che .data contiene già? Perché init può essere chiamata di nuovo per ricominciare la partita: mai fidarsi di ciò che la memoria conteneva.
+DA COMPRENDERE OGGI: indirizzo, valore, load, store.</a:t>
             </a:r>
             <a:endParaRPr lang="en-US" dirty="0"/>
           </a:p>
@@ -1997,6 +2010,7 @@
             <a:r>
               <a:rPr lang="en-US" dirty="0"/>
               <a:t>verm1_draw fa tre chiamate: cancella lo schermo, scrive il titolo, disegna la testa. Salva quindi ra in un frame di stack all'inizio e lo ripristina alla fine, come nella Lezione 02. Guardate come la cella diventa pixel: la colonna è caricata in a0 e scorsa a sinistra di 3; la riga è caricata in a1, scorsa e aumentata di TOP. Gli argomenti restanti sono larghezza, altezza e colore. Gli argomenti viaggiano da a0 ad a4, nell'ordine in cui la funzione li aspetta.
+DA COMPRENDERE OGGI: perché si salva ra; shift come moltiplicazione.
 Per il docente: prg32_gfx_text8(x, y, stringa, colore del testo, colore dello sfondo); prg32_gfx_rect(x, y, larghezza, altezza, colore).</a:t>
             </a:r>
             <a:endParaRPr lang="en-US" dirty="0"/>
@@ -3206,6 +3220,420 @@
       </p:pic>
       <p:sp>
         <p:nvSpPr>
+          <p:cNvPr id="15" name="Shape 12"/>
+          <p:cNvSpPr/>
+          <p:nvPr/>
+        </p:nvSpPr>
+        <p:spPr>
+          <a:xfrm>
+            <a:off x="8910777" y="91440"/>
+            <a:ext cx="2732278" cy="274320"/>
+          </a:xfrm>
+          <a:prstGeom prst="rect">
+            <a:avLst/>
+          </a:prstGeom>
+          <a:solidFill>
+            <a:srgbClr val="F3E8FF"/>
+          </a:solidFill>
+          <a:ln w="12700">
+            <a:solidFill>
+              <a:srgbClr val="7E22CE"/>
+            </a:solidFill>
+            <a:prstDash val="dash"/>
+          </a:ln>
+        </p:spPr>
+      </p:sp>
+      <p:sp>
+        <p:nvSpPr>
+          <p:cNvPr id="16" name="Shape 13"/>
+          <p:cNvSpPr/>
+          <p:nvPr/>
+        </p:nvSpPr>
+        <p:spPr>
+          <a:xfrm>
+            <a:off x="8938209" y="128016"/>
+            <a:ext cx="45720" cy="45720"/>
+          </a:xfrm>
+          <a:prstGeom prst="rect">
+            <a:avLst/>
+          </a:prstGeom>
+          <a:solidFill>
+            <a:srgbClr val="7E22CE"/>
+          </a:solidFill>
+          <a:ln w="12700">
+            <a:solidFill>
+              <a:srgbClr val="7E22CE"/>
+            </a:solidFill>
+            <a:prstDash val="solid"/>
+          </a:ln>
+        </p:spPr>
+      </p:sp>
+      <p:sp>
+        <p:nvSpPr>
+          <p:cNvPr id="17" name="Shape 14"/>
+          <p:cNvSpPr/>
+          <p:nvPr/>
+        </p:nvSpPr>
+        <p:spPr>
+          <a:xfrm>
+            <a:off x="8938209" y="205740"/>
+            <a:ext cx="45720" cy="45720"/>
+          </a:xfrm>
+          <a:prstGeom prst="rect">
+            <a:avLst/>
+          </a:prstGeom>
+          <a:solidFill>
+            <a:srgbClr val="7E22CE"/>
+          </a:solidFill>
+          <a:ln w="12700">
+            <a:solidFill>
+              <a:srgbClr val="7E22CE"/>
+            </a:solidFill>
+            <a:prstDash val="solid"/>
+          </a:ln>
+        </p:spPr>
+      </p:sp>
+      <p:sp>
+        <p:nvSpPr>
+          <p:cNvPr id="18" name="Shape 15"/>
+          <p:cNvSpPr/>
+          <p:nvPr/>
+        </p:nvSpPr>
+        <p:spPr>
+          <a:xfrm>
+            <a:off x="8938209" y="283464"/>
+            <a:ext cx="45720" cy="45720"/>
+          </a:xfrm>
+          <a:prstGeom prst="rect">
+            <a:avLst/>
+          </a:prstGeom>
+          <a:solidFill>
+            <a:srgbClr val="7E22CE"/>
+          </a:solidFill>
+          <a:ln w="12700">
+            <a:solidFill>
+              <a:srgbClr val="7E22CE"/>
+            </a:solidFill>
+            <a:prstDash val="solid"/>
+          </a:ln>
+        </p:spPr>
+      </p:sp>
+      <p:pic>
+        <p:nvPicPr>
+          <p:cNvPr id="19" name="Image 1" descr="preencoded.png">    </p:cNvPr>
+          <p:cNvPicPr>
+            <a:picLocks noChangeAspect="1"/>
+          </p:cNvPicPr>
+          <p:nvPr/>
+        </p:nvPicPr>
+        <p:blipFill>
+          <a:blip r:embed="rId2"/>
+          <a:stretch>
+            <a:fillRect/>
+          </a:stretch>
+        </p:blipFill>
+        <p:spPr>
+          <a:xfrm>
+            <a:off x="9038793" y="128016"/>
+            <a:ext cx="201168" cy="201168"/>
+          </a:xfrm>
+          <a:prstGeom prst="rect">
+            <a:avLst/>
+          </a:prstGeom>
+        </p:spPr>
+      </p:pic>
+      <p:sp>
+        <p:nvSpPr>
+          <p:cNvPr id="20" name="Text 16"/>
+          <p:cNvSpPr txBox="1"/>
+          <p:nvPr/>
+        </p:nvSpPr>
+        <p:spPr>
+          <a:xfrm>
+            <a:off x="9294825" y="91440"/>
+            <a:ext cx="2311654" cy="274320"/>
+          </a:xfrm>
+          <a:prstGeom prst="rect">
+            <a:avLst/>
+          </a:prstGeom>
+          <a:noFill/>
+          <a:ln/>
+        </p:spPr>
+        <p:txBody>
+          <a:bodyPr wrap="square" lIns="0" tIns="0" rIns="0" bIns="0" rtlCol="0" anchor="ctr"/>
+          <a:lstStyle/>
+          <a:p>
+            <a:pPr indent="0" marL="0">
+              <a:buNone/>
+            </a:pPr>
+            <a:r>
+              <a:rPr lang="en-US" sz="1100" b="1" dirty="0">
+                <a:solidFill>
+                  <a:srgbClr val="6B21A8"/>
+                </a:solidFill>
+                <a:latin typeface="Calibri" pitchFamily="34" charset="0"/>
+                <a:ea typeface="Calibri" pitchFamily="34" charset="-122"/>
+                <a:cs typeface="Calibri" pitchFamily="34" charset="-120"/>
+              </a:rPr>
+              <a:t>DA COMPRENDERE PIÙ AVANTI</a:t>
+            </a:r>
+            <a:endParaRPr lang="en-US" sz="1100" dirty="0"/>
+          </a:p>
+        </p:txBody>
+      </p:sp>
+      <p:sp>
+        <p:nvSpPr>
+          <p:cNvPr id="21" name="Shape 17"/>
+          <p:cNvSpPr/>
+          <p:nvPr/>
+        </p:nvSpPr>
+        <p:spPr>
+          <a:xfrm>
+            <a:off x="6675069" y="91440"/>
+            <a:ext cx="2125980" cy="274320"/>
+          </a:xfrm>
+          <a:prstGeom prst="rect">
+            <a:avLst/>
+          </a:prstGeom>
+          <a:solidFill>
+            <a:srgbClr val="FEF3C7"/>
+          </a:solidFill>
+          <a:ln w="12700">
+            <a:solidFill>
+              <a:srgbClr val="B45309"/>
+            </a:solidFill>
+            <a:prstDash val="solid"/>
+          </a:ln>
+        </p:spPr>
+      </p:sp>
+      <p:sp>
+        <p:nvSpPr>
+          <p:cNvPr id="22" name="Shape 18"/>
+          <p:cNvSpPr/>
+          <p:nvPr/>
+        </p:nvSpPr>
+        <p:spPr>
+          <a:xfrm>
+            <a:off x="6675069" y="91440"/>
+            <a:ext cx="27432" cy="274320"/>
+          </a:xfrm>
+          <a:prstGeom prst="rect">
+            <a:avLst/>
+          </a:prstGeom>
+          <a:solidFill>
+            <a:srgbClr val="B45309"/>
+          </a:solidFill>
+          <a:ln w="12700">
+            <a:solidFill>
+              <a:srgbClr val="B45309"/>
+            </a:solidFill>
+            <a:prstDash val="solid"/>
+          </a:ln>
+        </p:spPr>
+      </p:sp>
+      <p:sp>
+        <p:nvSpPr>
+          <p:cNvPr id="23" name="Shape 19"/>
+          <p:cNvSpPr/>
+          <p:nvPr/>
+        </p:nvSpPr>
+        <p:spPr>
+          <a:xfrm>
+            <a:off x="6729933" y="91440"/>
+            <a:ext cx="27432" cy="274320"/>
+          </a:xfrm>
+          <a:prstGeom prst="rect">
+            <a:avLst/>
+          </a:prstGeom>
+          <a:solidFill>
+            <a:srgbClr val="B45309"/>
+          </a:solidFill>
+          <a:ln w="12700">
+            <a:solidFill>
+              <a:srgbClr val="B45309"/>
+            </a:solidFill>
+            <a:prstDash val="solid"/>
+          </a:ln>
+        </p:spPr>
+      </p:sp>
+      <p:pic>
+        <p:nvPicPr>
+          <p:cNvPr id="24" name="Image 2" descr="preencoded.png">    </p:cNvPr>
+          <p:cNvPicPr>
+            <a:picLocks noChangeAspect="1"/>
+          </p:cNvPicPr>
+          <p:nvPr/>
+        </p:nvPicPr>
+        <p:blipFill>
+          <a:blip r:embed="rId3"/>
+          <a:stretch>
+            <a:fillRect/>
+          </a:stretch>
+        </p:blipFill>
+        <p:spPr>
+          <a:xfrm>
+            <a:off x="6803085" y="128016"/>
+            <a:ext cx="201168" cy="201168"/>
+          </a:xfrm>
+          <a:prstGeom prst="rect">
+            <a:avLst/>
+          </a:prstGeom>
+        </p:spPr>
+      </p:pic>
+      <p:sp>
+        <p:nvSpPr>
+          <p:cNvPr id="25" name="Text 20"/>
+          <p:cNvSpPr txBox="1"/>
+          <p:nvPr/>
+        </p:nvSpPr>
+        <p:spPr>
+          <a:xfrm>
+            <a:off x="7059117" y="91440"/>
+            <a:ext cx="1705356" cy="274320"/>
+          </a:xfrm>
+          <a:prstGeom prst="rect">
+            <a:avLst/>
+          </a:prstGeom>
+          <a:noFill/>
+          <a:ln/>
+        </p:spPr>
+        <p:txBody>
+          <a:bodyPr wrap="square" lIns="0" tIns="0" rIns="0" bIns="0" rtlCol="0" anchor="ctr"/>
+          <a:lstStyle/>
+          <a:p>
+            <a:pPr indent="0" marL="0">
+              <a:buNone/>
+            </a:pPr>
+            <a:r>
+              <a:rPr lang="en-US" sz="1100" b="1" dirty="0">
+                <a:solidFill>
+                  <a:srgbClr val="92400E"/>
+                </a:solidFill>
+                <a:latin typeface="Calibri" pitchFamily="34" charset="0"/>
+                <a:ea typeface="Calibri" pitchFamily="34" charset="-122"/>
+                <a:cs typeface="Calibri" pitchFamily="34" charset="-120"/>
+              </a:rPr>
+              <a:t>DA UTILIZZARE OGGI</a:t>
+            </a:r>
+            <a:endParaRPr lang="en-US" sz="1100" dirty="0"/>
+          </a:p>
+        </p:txBody>
+      </p:sp>
+      <p:sp>
+        <p:nvSpPr>
+          <p:cNvPr id="26" name="Shape 21"/>
+          <p:cNvSpPr/>
+          <p:nvPr/>
+        </p:nvSpPr>
+        <p:spPr>
+          <a:xfrm>
+            <a:off x="4352747" y="91440"/>
+            <a:ext cx="2212594" cy="274320"/>
+          </a:xfrm>
+          <a:prstGeom prst="rect">
+            <a:avLst/>
+          </a:prstGeom>
+          <a:solidFill>
+            <a:srgbClr val="E0F2FE"/>
+          </a:solidFill>
+          <a:ln w="12700">
+            <a:solidFill>
+              <a:srgbClr val="0369A1"/>
+            </a:solidFill>
+            <a:prstDash val="solid"/>
+          </a:ln>
+        </p:spPr>
+      </p:sp>
+      <p:sp>
+        <p:nvSpPr>
+          <p:cNvPr id="27" name="Shape 22"/>
+          <p:cNvSpPr/>
+          <p:nvPr/>
+        </p:nvSpPr>
+        <p:spPr>
+          <a:xfrm>
+            <a:off x="4352747" y="91440"/>
+            <a:ext cx="73152" cy="274320"/>
+          </a:xfrm>
+          <a:prstGeom prst="rect">
+            <a:avLst/>
+          </a:prstGeom>
+          <a:solidFill>
+            <a:srgbClr val="0369A1"/>
+          </a:solidFill>
+          <a:ln w="12700">
+            <a:solidFill>
+              <a:srgbClr val="0369A1"/>
+            </a:solidFill>
+            <a:prstDash val="solid"/>
+          </a:ln>
+        </p:spPr>
+      </p:sp>
+      <p:pic>
+        <p:nvPicPr>
+          <p:cNvPr id="28" name="Image 3" descr="preencoded.png">    </p:cNvPr>
+          <p:cNvPicPr>
+            <a:picLocks noChangeAspect="1"/>
+          </p:cNvPicPr>
+          <p:nvPr/>
+        </p:nvPicPr>
+        <p:blipFill>
+          <a:blip r:embed="rId4"/>
+          <a:stretch>
+            <a:fillRect/>
+          </a:stretch>
+        </p:blipFill>
+        <p:spPr>
+          <a:xfrm>
+            <a:off x="4480763" y="128016"/>
+            <a:ext cx="201168" cy="201168"/>
+          </a:xfrm>
+          <a:prstGeom prst="rect">
+            <a:avLst/>
+          </a:prstGeom>
+        </p:spPr>
+      </p:pic>
+      <p:sp>
+        <p:nvSpPr>
+          <p:cNvPr id="29" name="Text 23"/>
+          <p:cNvSpPr txBox="1"/>
+          <p:nvPr/>
+        </p:nvSpPr>
+        <p:spPr>
+          <a:xfrm>
+            <a:off x="4736795" y="91440"/>
+            <a:ext cx="1791970" cy="274320"/>
+          </a:xfrm>
+          <a:prstGeom prst="rect">
+            <a:avLst/>
+          </a:prstGeom>
+          <a:noFill/>
+          <a:ln/>
+        </p:spPr>
+        <p:txBody>
+          <a:bodyPr wrap="square" lIns="0" tIns="0" rIns="0" bIns="0" rtlCol="0" anchor="ctr"/>
+          <a:lstStyle/>
+          <a:p>
+            <a:pPr indent="0" marL="0">
+              <a:buNone/>
+            </a:pPr>
+            <a:r>
+              <a:rPr lang="en-US" sz="1100" b="1" dirty="0">
+                <a:solidFill>
+                  <a:srgbClr val="075985"/>
+                </a:solidFill>
+                <a:latin typeface="Calibri" pitchFamily="34" charset="0"/>
+                <a:ea typeface="Calibri" pitchFamily="34" charset="-122"/>
+                <a:cs typeface="Calibri" pitchFamily="34" charset="-120"/>
+              </a:rPr>
+              <a:t>DA COMPRENDERE OGGI</a:t>
+            </a:r>
+            <a:endParaRPr lang="en-US" sz="1100" dirty="0"/>
+          </a:p>
+        </p:txBody>
+      </p:sp>
+      <p:sp>
+        <p:nvSpPr>
           <p:cNvPr id="25" name="Slide Number Placeholder 0"/>
           <p:cNvSpPr>
             <a:spLocks noGrp="1"/>
@@ -4214,6 +4642,133 @@
       </p:sp>
       <p:sp>
         <p:nvSpPr>
+          <p:cNvPr id="17" name="Shape 15"/>
+          <p:cNvSpPr/>
+          <p:nvPr/>
+        </p:nvSpPr>
+        <p:spPr>
+          <a:xfrm>
+            <a:off x="8182940" y="91440"/>
+            <a:ext cx="3460115" cy="274320"/>
+          </a:xfrm>
+          <a:prstGeom prst="rect">
+            <a:avLst/>
+          </a:prstGeom>
+          <a:solidFill>
+            <a:srgbClr val="E0F2FE"/>
+          </a:solidFill>
+          <a:ln w="12700">
+            <a:solidFill>
+              <a:srgbClr val="0369A1"/>
+            </a:solidFill>
+            <a:prstDash val="solid"/>
+          </a:ln>
+        </p:spPr>
+      </p:sp>
+      <p:sp>
+        <p:nvSpPr>
+          <p:cNvPr id="18" name="Shape 16"/>
+          <p:cNvSpPr/>
+          <p:nvPr/>
+        </p:nvSpPr>
+        <p:spPr>
+          <a:xfrm>
+            <a:off x="8182940" y="91440"/>
+            <a:ext cx="73152" cy="274320"/>
+          </a:xfrm>
+          <a:prstGeom prst="rect">
+            <a:avLst/>
+          </a:prstGeom>
+          <a:solidFill>
+            <a:srgbClr val="0369A1"/>
+          </a:solidFill>
+          <a:ln w="12700">
+            <a:solidFill>
+              <a:srgbClr val="0369A1"/>
+            </a:solidFill>
+            <a:prstDash val="solid"/>
+          </a:ln>
+        </p:spPr>
+      </p:sp>
+      <p:pic>
+        <p:nvPicPr>
+          <p:cNvPr id="19" name="Image 0" descr="preencoded.png">    </p:cNvPr>
+          <p:cNvPicPr>
+            <a:picLocks noChangeAspect="1"/>
+          </p:cNvPicPr>
+          <p:nvPr/>
+        </p:nvPicPr>
+        <p:blipFill>
+          <a:blip r:embed="rId1"/>
+          <a:stretch>
+            <a:fillRect/>
+          </a:stretch>
+        </p:blipFill>
+        <p:spPr>
+          <a:xfrm>
+            <a:off x="8310956" y="128016"/>
+            <a:ext cx="201168" cy="201168"/>
+          </a:xfrm>
+          <a:prstGeom prst="rect">
+            <a:avLst/>
+          </a:prstGeom>
+        </p:spPr>
+      </p:pic>
+      <p:sp>
+        <p:nvSpPr>
+          <p:cNvPr id="20" name="Text 17"/>
+          <p:cNvSpPr txBox="1"/>
+          <p:nvPr/>
+        </p:nvSpPr>
+        <p:spPr>
+          <a:xfrm>
+            <a:off x="8566988" y="91440"/>
+            <a:ext cx="3039491" cy="274320"/>
+          </a:xfrm>
+          <a:prstGeom prst="rect">
+            <a:avLst/>
+          </a:prstGeom>
+          <a:noFill/>
+          <a:ln/>
+        </p:spPr>
+        <p:txBody>
+          <a:bodyPr wrap="square" lIns="0" tIns="0" rIns="0" bIns="0" rtlCol="0" anchor="ctr"/>
+          <a:lstStyle/>
+          <a:p>
+            <a:pPr indent="0" marL="0">
+              <a:buNone/>
+            </a:pPr>
+            <a:r>
+              <a:rPr lang="en-US" sz="1100" b="1" dirty="0">
+                <a:solidFill>
+                  <a:srgbClr val="075985"/>
+                </a:solidFill>
+                <a:latin typeface="Calibri" pitchFamily="34" charset="0"/>
+                <a:ea typeface="Calibri" pitchFamily="34" charset="-122"/>
+                <a:cs typeface="Calibri" pitchFamily="34" charset="-120"/>
+              </a:rPr>
+              <a:t>DA COMPRENDERE OGGI</a:t>
+            </a:r>
+            <a:pPr indent="0" marL="0">
+              <a:buNone/>
+            </a:pPr>
+            <a:r>
+              <a:rPr lang="en-US" sz="1100" dirty="0">
+                <a:solidFill>
+                  <a:srgbClr val="075985"/>
+                </a:solidFill>
+                <a:latin typeface="Calibri" pitchFamily="34" charset="0"/>
+                <a:ea typeface="Calibri" pitchFamily="34" charset="-122"/>
+                <a:cs typeface="Calibri" pitchFamily="34" charset="-120"/>
+              </a:rPr>
+              <a:t> · la virgola fissa</a:t>
+            </a:r>
+            <a:endParaRPr lang="en-US" sz="1100" dirty="0"/>
+          </a:p>
+        </p:txBody>
+      </p:sp>
+      <p:sp>
+        <p:nvSpPr>
           <p:cNvPr id="25" name="Slide Number Placeholder 0"/>
           <p:cNvSpPr>
             <a:spLocks noGrp="1"/>
@@ -5672,6 +6227,324 @@
       </p:sp>
       <p:sp>
         <p:nvSpPr>
+          <p:cNvPr id="17" name="Shape 15"/>
+          <p:cNvSpPr/>
+          <p:nvPr/>
+        </p:nvSpPr>
+        <p:spPr>
+          <a:xfrm>
+            <a:off x="6175451" y="91440"/>
+            <a:ext cx="5467604" cy="274320"/>
+          </a:xfrm>
+          <a:prstGeom prst="rect">
+            <a:avLst/>
+          </a:prstGeom>
+          <a:solidFill>
+            <a:srgbClr val="F3E8FF"/>
+          </a:solidFill>
+          <a:ln w="12700">
+            <a:solidFill>
+              <a:srgbClr val="7E22CE"/>
+            </a:solidFill>
+            <a:prstDash val="dash"/>
+          </a:ln>
+        </p:spPr>
+      </p:sp>
+      <p:sp>
+        <p:nvSpPr>
+          <p:cNvPr id="18" name="Shape 16"/>
+          <p:cNvSpPr/>
+          <p:nvPr/>
+        </p:nvSpPr>
+        <p:spPr>
+          <a:xfrm>
+            <a:off x="6202883" y="128016"/>
+            <a:ext cx="45720" cy="45720"/>
+          </a:xfrm>
+          <a:prstGeom prst="rect">
+            <a:avLst/>
+          </a:prstGeom>
+          <a:solidFill>
+            <a:srgbClr val="7E22CE"/>
+          </a:solidFill>
+          <a:ln w="12700">
+            <a:solidFill>
+              <a:srgbClr val="7E22CE"/>
+            </a:solidFill>
+            <a:prstDash val="solid"/>
+          </a:ln>
+        </p:spPr>
+      </p:sp>
+      <p:sp>
+        <p:nvSpPr>
+          <p:cNvPr id="19" name="Shape 17"/>
+          <p:cNvSpPr/>
+          <p:nvPr/>
+        </p:nvSpPr>
+        <p:spPr>
+          <a:xfrm>
+            <a:off x="6202883" y="205740"/>
+            <a:ext cx="45720" cy="45720"/>
+          </a:xfrm>
+          <a:prstGeom prst="rect">
+            <a:avLst/>
+          </a:prstGeom>
+          <a:solidFill>
+            <a:srgbClr val="7E22CE"/>
+          </a:solidFill>
+          <a:ln w="12700">
+            <a:solidFill>
+              <a:srgbClr val="7E22CE"/>
+            </a:solidFill>
+            <a:prstDash val="solid"/>
+          </a:ln>
+        </p:spPr>
+      </p:sp>
+      <p:sp>
+        <p:nvSpPr>
+          <p:cNvPr id="20" name="Shape 18"/>
+          <p:cNvSpPr/>
+          <p:nvPr/>
+        </p:nvSpPr>
+        <p:spPr>
+          <a:xfrm>
+            <a:off x="6202883" y="283464"/>
+            <a:ext cx="45720" cy="45720"/>
+          </a:xfrm>
+          <a:prstGeom prst="rect">
+            <a:avLst/>
+          </a:prstGeom>
+          <a:solidFill>
+            <a:srgbClr val="7E22CE"/>
+          </a:solidFill>
+          <a:ln w="12700">
+            <a:solidFill>
+              <a:srgbClr val="7E22CE"/>
+            </a:solidFill>
+            <a:prstDash val="solid"/>
+          </a:ln>
+        </p:spPr>
+      </p:sp>
+      <p:pic>
+        <p:nvPicPr>
+          <p:cNvPr id="21" name="Image 0" descr="preencoded.png">    </p:cNvPr>
+          <p:cNvPicPr>
+            <a:picLocks noChangeAspect="1"/>
+          </p:cNvPicPr>
+          <p:nvPr/>
+        </p:nvPicPr>
+        <p:blipFill>
+          <a:blip r:embed="rId1"/>
+          <a:stretch>
+            <a:fillRect/>
+          </a:stretch>
+        </p:blipFill>
+        <p:spPr>
+          <a:xfrm>
+            <a:off x="6303467" y="128016"/>
+            <a:ext cx="201168" cy="201168"/>
+          </a:xfrm>
+          <a:prstGeom prst="rect">
+            <a:avLst/>
+          </a:prstGeom>
+        </p:spPr>
+      </p:pic>
+      <p:sp>
+        <p:nvSpPr>
+          <p:cNvPr id="22" name="Text 19"/>
+          <p:cNvSpPr txBox="1"/>
+          <p:nvPr/>
+        </p:nvSpPr>
+        <p:spPr>
+          <a:xfrm>
+            <a:off x="6559499" y="91440"/>
+            <a:ext cx="5046980" cy="274320"/>
+          </a:xfrm>
+          <a:prstGeom prst="rect">
+            <a:avLst/>
+          </a:prstGeom>
+          <a:noFill/>
+          <a:ln/>
+        </p:spPr>
+        <p:txBody>
+          <a:bodyPr wrap="square" lIns="0" tIns="0" rIns="0" bIns="0" rtlCol="0" anchor="ctr"/>
+          <a:lstStyle/>
+          <a:p>
+            <a:pPr indent="0" marL="0">
+              <a:buNone/>
+            </a:pPr>
+            <a:r>
+              <a:rPr lang="en-US" sz="1100" b="1" dirty="0">
+                <a:solidFill>
+                  <a:srgbClr val="6B21A8"/>
+                </a:solidFill>
+                <a:latin typeface="Calibri" pitchFamily="34" charset="0"/>
+                <a:ea typeface="Calibri" pitchFamily="34" charset="-122"/>
+                <a:cs typeface="Calibri" pitchFamily="34" charset="-120"/>
+              </a:rPr>
+              <a:t>DA COMPRENDERE PIÙ AVANTI</a:t>
+            </a:r>
+            <a:pPr indent="0" marL="0">
+              <a:buNone/>
+            </a:pPr>
+            <a:r>
+              <a:rPr lang="en-US" sz="1100" dirty="0">
+                <a:solidFill>
+                  <a:srgbClr val="6B21A8"/>
+                </a:solidFill>
+                <a:latin typeface="Calibri" pitchFamily="34" charset="0"/>
+                <a:ea typeface="Calibri" pitchFamily="34" charset="-122"/>
+                <a:cs typeface="Calibri" pitchFamily="34" charset="-120"/>
+              </a:rPr>
+              <a:t> · formati delle istruzioni</a:t>
+            </a:r>
+            <a:pPr indent="0" marL="0">
+              <a:buNone/>
+            </a:pPr>
+            <a:r>
+              <a:rPr lang="en-US" sz="1100" b="1" dirty="0">
+                <a:solidFill>
+                  <a:srgbClr val="6B21A8"/>
+                </a:solidFill>
+                <a:latin typeface="Calibri" pitchFamily="34" charset="0"/>
+                <a:ea typeface="Calibri" pitchFamily="34" charset="-122"/>
+                <a:cs typeface="Calibri" pitchFamily="34" charset="-120"/>
+              </a:rPr>
+              <a:t> → Lezione 19</a:t>
+            </a:r>
+            <a:endParaRPr lang="en-US" sz="1100" dirty="0"/>
+          </a:p>
+        </p:txBody>
+      </p:sp>
+      <p:sp>
+        <p:nvSpPr>
+          <p:cNvPr id="23" name="Shape 20"/>
+          <p:cNvSpPr/>
+          <p:nvPr/>
+        </p:nvSpPr>
+        <p:spPr>
+          <a:xfrm>
+            <a:off x="2342972" y="91440"/>
+            <a:ext cx="3722751" cy="274320"/>
+          </a:xfrm>
+          <a:prstGeom prst="rect">
+            <a:avLst/>
+          </a:prstGeom>
+          <a:solidFill>
+            <a:srgbClr val="E0F2FE"/>
+          </a:solidFill>
+          <a:ln w="12700">
+            <a:solidFill>
+              <a:srgbClr val="0369A1"/>
+            </a:solidFill>
+            <a:prstDash val="solid"/>
+          </a:ln>
+        </p:spPr>
+      </p:sp>
+      <p:sp>
+        <p:nvSpPr>
+          <p:cNvPr id="24" name="Shape 21"/>
+          <p:cNvSpPr/>
+          <p:nvPr/>
+        </p:nvSpPr>
+        <p:spPr>
+          <a:xfrm>
+            <a:off x="2342972" y="91440"/>
+            <a:ext cx="73152" cy="274320"/>
+          </a:xfrm>
+          <a:prstGeom prst="rect">
+            <a:avLst/>
+          </a:prstGeom>
+          <a:solidFill>
+            <a:srgbClr val="0369A1"/>
+          </a:solidFill>
+          <a:ln w="12700">
+            <a:solidFill>
+              <a:srgbClr val="0369A1"/>
+            </a:solidFill>
+            <a:prstDash val="solid"/>
+          </a:ln>
+        </p:spPr>
+      </p:sp>
+      <p:pic>
+        <p:nvPicPr>
+          <p:cNvPr id="25" name="Image 1" descr="preencoded.png">    </p:cNvPr>
+          <p:cNvPicPr>
+            <a:picLocks noChangeAspect="1"/>
+          </p:cNvPicPr>
+          <p:nvPr/>
+        </p:nvPicPr>
+        <p:blipFill>
+          <a:blip r:embed="rId2"/>
+          <a:stretch>
+            <a:fillRect/>
+          </a:stretch>
+        </p:blipFill>
+        <p:spPr>
+          <a:xfrm>
+            <a:off x="2470988" y="128016"/>
+            <a:ext cx="201168" cy="201168"/>
+          </a:xfrm>
+          <a:prstGeom prst="rect">
+            <a:avLst/>
+          </a:prstGeom>
+        </p:spPr>
+      </p:pic>
+      <p:sp>
+        <p:nvSpPr>
+          <p:cNvPr id="26" name="Text 22"/>
+          <p:cNvSpPr txBox="1"/>
+          <p:nvPr/>
+        </p:nvSpPr>
+        <p:spPr>
+          <a:xfrm>
+            <a:off x="2727020" y="91440"/>
+            <a:ext cx="3302127" cy="274320"/>
+          </a:xfrm>
+          <a:prstGeom prst="rect">
+            <a:avLst/>
+          </a:prstGeom>
+          <a:noFill/>
+          <a:ln/>
+        </p:spPr>
+        <p:txBody>
+          <a:bodyPr wrap="square" lIns="0" tIns="0" rIns="0" bIns="0" rtlCol="0" anchor="ctr"/>
+          <a:lstStyle/>
+          <a:p>
+            <a:pPr indent="0" marL="0">
+              <a:buNone/>
+            </a:pPr>
+            <a:r>
+              <a:rPr lang="en-US" sz="1100" b="1" dirty="0">
+                <a:solidFill>
+                  <a:srgbClr val="075985"/>
+                </a:solidFill>
+                <a:latin typeface="Calibri" pitchFamily="34" charset="0"/>
+                <a:ea typeface="Calibri" pitchFamily="34" charset="-122"/>
+                <a:cs typeface="Calibri" pitchFamily="34" charset="-120"/>
+              </a:rPr>
+              <a:t>DA COMPRENDERE OGGI</a:t>
+            </a:r>
+            <a:pPr indent="0" marL="0">
+              <a:buNone/>
+            </a:pPr>
+            <a:r>
+              <a:rPr lang="en-US" sz="1100" dirty="0">
+                <a:solidFill>
+                  <a:srgbClr val="075985"/>
+                </a:solidFill>
+                <a:latin typeface="Calibri" pitchFamily="34" charset="0"/>
+                <a:ea typeface="Calibri" pitchFamily="34" charset="-122"/>
+                <a:cs typeface="Calibri" pitchFamily="34" charset="-120"/>
+              </a:rPr>
+              <a:t> · le pseudo-istruzioni</a:t>
+            </a:r>
+            <a:endParaRPr lang="en-US" sz="1100" dirty="0"/>
+          </a:p>
+        </p:txBody>
+      </p:sp>
+      <p:sp>
+        <p:nvSpPr>
           <p:cNvPr id="25" name="Slide Number Placeholder 0"/>
           <p:cNvSpPr>
             <a:spLocks noGrp="1"/>
@@ -6825,6 +7698,158 @@
       </p:sp>
       <p:sp>
         <p:nvSpPr>
+          <p:cNvPr id="17" name="Shape 15"/>
+          <p:cNvSpPr/>
+          <p:nvPr/>
+        </p:nvSpPr>
+        <p:spPr>
+          <a:xfrm>
+            <a:off x="7875600" y="91440"/>
+            <a:ext cx="3767455" cy="274320"/>
+          </a:xfrm>
+          <a:prstGeom prst="rect">
+            <a:avLst/>
+          </a:prstGeom>
+          <a:solidFill>
+            <a:srgbClr val="FEF3C7"/>
+          </a:solidFill>
+          <a:ln w="12700">
+            <a:solidFill>
+              <a:srgbClr val="B45309"/>
+            </a:solidFill>
+            <a:prstDash val="solid"/>
+          </a:ln>
+        </p:spPr>
+      </p:sp>
+      <p:sp>
+        <p:nvSpPr>
+          <p:cNvPr id="18" name="Shape 16"/>
+          <p:cNvSpPr/>
+          <p:nvPr/>
+        </p:nvSpPr>
+        <p:spPr>
+          <a:xfrm>
+            <a:off x="7875600" y="91440"/>
+            <a:ext cx="27432" cy="274320"/>
+          </a:xfrm>
+          <a:prstGeom prst="rect">
+            <a:avLst/>
+          </a:prstGeom>
+          <a:solidFill>
+            <a:srgbClr val="B45309"/>
+          </a:solidFill>
+          <a:ln w="12700">
+            <a:solidFill>
+              <a:srgbClr val="B45309"/>
+            </a:solidFill>
+            <a:prstDash val="solid"/>
+          </a:ln>
+        </p:spPr>
+      </p:sp>
+      <p:sp>
+        <p:nvSpPr>
+          <p:cNvPr id="19" name="Shape 17"/>
+          <p:cNvSpPr/>
+          <p:nvPr/>
+        </p:nvSpPr>
+        <p:spPr>
+          <a:xfrm>
+            <a:off x="7930464" y="91440"/>
+            <a:ext cx="27432" cy="274320"/>
+          </a:xfrm>
+          <a:prstGeom prst="rect">
+            <a:avLst/>
+          </a:prstGeom>
+          <a:solidFill>
+            <a:srgbClr val="B45309"/>
+          </a:solidFill>
+          <a:ln w="12700">
+            <a:solidFill>
+              <a:srgbClr val="B45309"/>
+            </a:solidFill>
+            <a:prstDash val="solid"/>
+          </a:ln>
+        </p:spPr>
+      </p:sp>
+      <p:pic>
+        <p:nvPicPr>
+          <p:cNvPr id="20" name="Image 0" descr="preencoded.png">    </p:cNvPr>
+          <p:cNvPicPr>
+            <a:picLocks noChangeAspect="1"/>
+          </p:cNvPicPr>
+          <p:nvPr/>
+        </p:nvPicPr>
+        <p:blipFill>
+          <a:blip r:embed="rId1"/>
+          <a:stretch>
+            <a:fillRect/>
+          </a:stretch>
+        </p:blipFill>
+        <p:spPr>
+          <a:xfrm>
+            <a:off x="8003616" y="128016"/>
+            <a:ext cx="201168" cy="201168"/>
+          </a:xfrm>
+          <a:prstGeom prst="rect">
+            <a:avLst/>
+          </a:prstGeom>
+        </p:spPr>
+      </p:pic>
+      <p:sp>
+        <p:nvSpPr>
+          <p:cNvPr id="21" name="Text 18"/>
+          <p:cNvSpPr txBox="1"/>
+          <p:nvPr/>
+        </p:nvSpPr>
+        <p:spPr>
+          <a:xfrm>
+            <a:off x="8259648" y="91440"/>
+            <a:ext cx="3346831" cy="274320"/>
+          </a:xfrm>
+          <a:prstGeom prst="rect">
+            <a:avLst/>
+          </a:prstGeom>
+          <a:noFill/>
+          <a:ln/>
+        </p:spPr>
+        <p:txBody>
+          <a:bodyPr wrap="square" lIns="0" tIns="0" rIns="0" bIns="0" rtlCol="0" anchor="ctr"/>
+          <a:lstStyle/>
+          <a:p>
+            <a:pPr indent="0" marL="0">
+              <a:buNone/>
+            </a:pPr>
+            <a:r>
+              <a:rPr lang="en-US" sz="1100" b="1" dirty="0">
+                <a:solidFill>
+                  <a:srgbClr val="92400E"/>
+                </a:solidFill>
+                <a:latin typeface="Calibri" pitchFamily="34" charset="0"/>
+                <a:ea typeface="Calibri" pitchFamily="34" charset="-122"/>
+                <a:cs typeface="Calibri" pitchFamily="34" charset="-120"/>
+              </a:rPr>
+              <a:t>DA UTILIZZARE OGGI</a:t>
+            </a:r>
+            <a:pPr indent="0" marL="0">
+              <a:buNone/>
+            </a:pPr>
+            <a:r>
+              <a:rPr lang="en-US" sz="1100" dirty="0">
+                <a:solidFill>
+                  <a:srgbClr val="92400E"/>
+                </a:solidFill>
+                <a:latin typeface="Calibri" pitchFamily="34" charset="0"/>
+                <a:ea typeface="Calibri" pitchFamily="34" charset="-122"/>
+                <a:cs typeface="Calibri" pitchFamily="34" charset="-120"/>
+              </a:rPr>
+              <a:t> · gli strumenti di PRG32</a:t>
+            </a:r>
+            <a:endParaRPr lang="en-US" sz="1100" dirty="0"/>
+          </a:p>
+        </p:txBody>
+      </p:sp>
+      <p:sp>
+        <p:nvSpPr>
           <p:cNvPr id="25" name="Slide Number Placeholder 0"/>
           <p:cNvSpPr>
             <a:spLocks noGrp="1"/>
@@ -7661,6 +8686,158 @@
       </p:sp>
       <p:sp>
         <p:nvSpPr>
+          <p:cNvPr id="17" name="Shape 15"/>
+          <p:cNvSpPr/>
+          <p:nvPr/>
+        </p:nvSpPr>
+        <p:spPr>
+          <a:xfrm>
+            <a:off x="7875600" y="91440"/>
+            <a:ext cx="3767455" cy="274320"/>
+          </a:xfrm>
+          <a:prstGeom prst="rect">
+            <a:avLst/>
+          </a:prstGeom>
+          <a:solidFill>
+            <a:srgbClr val="FEF3C7"/>
+          </a:solidFill>
+          <a:ln w="12700">
+            <a:solidFill>
+              <a:srgbClr val="B45309"/>
+            </a:solidFill>
+            <a:prstDash val="solid"/>
+          </a:ln>
+        </p:spPr>
+      </p:sp>
+      <p:sp>
+        <p:nvSpPr>
+          <p:cNvPr id="18" name="Shape 16"/>
+          <p:cNvSpPr/>
+          <p:nvPr/>
+        </p:nvSpPr>
+        <p:spPr>
+          <a:xfrm>
+            <a:off x="7875600" y="91440"/>
+            <a:ext cx="27432" cy="274320"/>
+          </a:xfrm>
+          <a:prstGeom prst="rect">
+            <a:avLst/>
+          </a:prstGeom>
+          <a:solidFill>
+            <a:srgbClr val="B45309"/>
+          </a:solidFill>
+          <a:ln w="12700">
+            <a:solidFill>
+              <a:srgbClr val="B45309"/>
+            </a:solidFill>
+            <a:prstDash val="solid"/>
+          </a:ln>
+        </p:spPr>
+      </p:sp>
+      <p:sp>
+        <p:nvSpPr>
+          <p:cNvPr id="19" name="Shape 17"/>
+          <p:cNvSpPr/>
+          <p:nvPr/>
+        </p:nvSpPr>
+        <p:spPr>
+          <a:xfrm>
+            <a:off x="7930464" y="91440"/>
+            <a:ext cx="27432" cy="274320"/>
+          </a:xfrm>
+          <a:prstGeom prst="rect">
+            <a:avLst/>
+          </a:prstGeom>
+          <a:solidFill>
+            <a:srgbClr val="B45309"/>
+          </a:solidFill>
+          <a:ln w="12700">
+            <a:solidFill>
+              <a:srgbClr val="B45309"/>
+            </a:solidFill>
+            <a:prstDash val="solid"/>
+          </a:ln>
+        </p:spPr>
+      </p:sp>
+      <p:pic>
+        <p:nvPicPr>
+          <p:cNvPr id="20" name="Image 0" descr="preencoded.png">    </p:cNvPr>
+          <p:cNvPicPr>
+            <a:picLocks noChangeAspect="1"/>
+          </p:cNvPicPr>
+          <p:nvPr/>
+        </p:nvPicPr>
+        <p:blipFill>
+          <a:blip r:embed="rId1"/>
+          <a:stretch>
+            <a:fillRect/>
+          </a:stretch>
+        </p:blipFill>
+        <p:spPr>
+          <a:xfrm>
+            <a:off x="8003616" y="128016"/>
+            <a:ext cx="201168" cy="201168"/>
+          </a:xfrm>
+          <a:prstGeom prst="rect">
+            <a:avLst/>
+          </a:prstGeom>
+        </p:spPr>
+      </p:pic>
+      <p:sp>
+        <p:nvSpPr>
+          <p:cNvPr id="21" name="Text 18"/>
+          <p:cNvSpPr txBox="1"/>
+          <p:nvPr/>
+        </p:nvSpPr>
+        <p:spPr>
+          <a:xfrm>
+            <a:off x="8259648" y="91440"/>
+            <a:ext cx="3346831" cy="274320"/>
+          </a:xfrm>
+          <a:prstGeom prst="rect">
+            <a:avLst/>
+          </a:prstGeom>
+          <a:noFill/>
+          <a:ln/>
+        </p:spPr>
+        <p:txBody>
+          <a:bodyPr wrap="square" lIns="0" tIns="0" rIns="0" bIns="0" rtlCol="0" anchor="ctr"/>
+          <a:lstStyle/>
+          <a:p>
+            <a:pPr indent="0" marL="0">
+              <a:buNone/>
+            </a:pPr>
+            <a:r>
+              <a:rPr lang="en-US" sz="1100" b="1" dirty="0">
+                <a:solidFill>
+                  <a:srgbClr val="92400E"/>
+                </a:solidFill>
+                <a:latin typeface="Calibri" pitchFamily="34" charset="0"/>
+                <a:ea typeface="Calibri" pitchFamily="34" charset="-122"/>
+                <a:cs typeface="Calibri" pitchFamily="34" charset="-120"/>
+              </a:rPr>
+              <a:t>DA UTILIZZARE OGGI</a:t>
+            </a:r>
+            <a:pPr indent="0" marL="0">
+              <a:buNone/>
+            </a:pPr>
+            <a:r>
+              <a:rPr lang="en-US" sz="1100" dirty="0">
+                <a:solidFill>
+                  <a:srgbClr val="92400E"/>
+                </a:solidFill>
+                <a:latin typeface="Calibri" pitchFamily="34" charset="0"/>
+                <a:ea typeface="Calibri" pitchFamily="34" charset="-122"/>
+                <a:cs typeface="Calibri" pitchFamily="34" charset="-120"/>
+              </a:rPr>
+              <a:t> · gli strumenti di PRG32</a:t>
+            </a:r>
+            <a:endParaRPr lang="en-US" sz="1100" dirty="0"/>
+          </a:p>
+        </p:txBody>
+      </p:sp>
+      <p:sp>
+        <p:nvSpPr>
           <p:cNvPr id="25" name="Slide Number Placeholder 0"/>
           <p:cNvSpPr>
             <a:spLocks noGrp="1"/>
@@ -8490,6 +9667,158 @@
                 <a:cs typeface="Calibri" pitchFamily="34" charset="-120"/>
               </a:rPr>
               <a:t>Schermo nero: confrontate il cablaggio del display con il firmware</a:t>
+            </a:r>
+            <a:endParaRPr lang="en-US" sz="1100" dirty="0"/>
+          </a:p>
+        </p:txBody>
+      </p:sp>
+      <p:sp>
+        <p:nvSpPr>
+          <p:cNvPr id="17" name="Shape 15"/>
+          <p:cNvSpPr/>
+          <p:nvPr/>
+        </p:nvSpPr>
+        <p:spPr>
+          <a:xfrm>
+            <a:off x="7875600" y="91440"/>
+            <a:ext cx="3767455" cy="274320"/>
+          </a:xfrm>
+          <a:prstGeom prst="rect">
+            <a:avLst/>
+          </a:prstGeom>
+          <a:solidFill>
+            <a:srgbClr val="FEF3C7"/>
+          </a:solidFill>
+          <a:ln w="12700">
+            <a:solidFill>
+              <a:srgbClr val="B45309"/>
+            </a:solidFill>
+            <a:prstDash val="solid"/>
+          </a:ln>
+        </p:spPr>
+      </p:sp>
+      <p:sp>
+        <p:nvSpPr>
+          <p:cNvPr id="18" name="Shape 16"/>
+          <p:cNvSpPr/>
+          <p:nvPr/>
+        </p:nvSpPr>
+        <p:spPr>
+          <a:xfrm>
+            <a:off x="7875600" y="91440"/>
+            <a:ext cx="27432" cy="274320"/>
+          </a:xfrm>
+          <a:prstGeom prst="rect">
+            <a:avLst/>
+          </a:prstGeom>
+          <a:solidFill>
+            <a:srgbClr val="B45309"/>
+          </a:solidFill>
+          <a:ln w="12700">
+            <a:solidFill>
+              <a:srgbClr val="B45309"/>
+            </a:solidFill>
+            <a:prstDash val="solid"/>
+          </a:ln>
+        </p:spPr>
+      </p:sp>
+      <p:sp>
+        <p:nvSpPr>
+          <p:cNvPr id="19" name="Shape 17"/>
+          <p:cNvSpPr/>
+          <p:nvPr/>
+        </p:nvSpPr>
+        <p:spPr>
+          <a:xfrm>
+            <a:off x="7930464" y="91440"/>
+            <a:ext cx="27432" cy="274320"/>
+          </a:xfrm>
+          <a:prstGeom prst="rect">
+            <a:avLst/>
+          </a:prstGeom>
+          <a:solidFill>
+            <a:srgbClr val="B45309"/>
+          </a:solidFill>
+          <a:ln w="12700">
+            <a:solidFill>
+              <a:srgbClr val="B45309"/>
+            </a:solidFill>
+            <a:prstDash val="solid"/>
+          </a:ln>
+        </p:spPr>
+      </p:sp>
+      <p:pic>
+        <p:nvPicPr>
+          <p:cNvPr id="20" name="Image 0" descr="preencoded.png">    </p:cNvPr>
+          <p:cNvPicPr>
+            <a:picLocks noChangeAspect="1"/>
+          </p:cNvPicPr>
+          <p:nvPr/>
+        </p:nvPicPr>
+        <p:blipFill>
+          <a:blip r:embed="rId1"/>
+          <a:stretch>
+            <a:fillRect/>
+          </a:stretch>
+        </p:blipFill>
+        <p:spPr>
+          <a:xfrm>
+            <a:off x="8003616" y="128016"/>
+            <a:ext cx="201168" cy="201168"/>
+          </a:xfrm>
+          <a:prstGeom prst="rect">
+            <a:avLst/>
+          </a:prstGeom>
+        </p:spPr>
+      </p:pic>
+      <p:sp>
+        <p:nvSpPr>
+          <p:cNvPr id="21" name="Text 18"/>
+          <p:cNvSpPr txBox="1"/>
+          <p:nvPr/>
+        </p:nvSpPr>
+        <p:spPr>
+          <a:xfrm>
+            <a:off x="8259648" y="91440"/>
+            <a:ext cx="3346831" cy="274320"/>
+          </a:xfrm>
+          <a:prstGeom prst="rect">
+            <a:avLst/>
+          </a:prstGeom>
+          <a:noFill/>
+          <a:ln/>
+        </p:spPr>
+        <p:txBody>
+          <a:bodyPr wrap="square" lIns="0" tIns="0" rIns="0" bIns="0" rtlCol="0" anchor="ctr"/>
+          <a:lstStyle/>
+          <a:p>
+            <a:pPr indent="0" marL="0">
+              <a:buNone/>
+            </a:pPr>
+            <a:r>
+              <a:rPr lang="en-US" sz="1100" b="1" dirty="0">
+                <a:solidFill>
+                  <a:srgbClr val="92400E"/>
+                </a:solidFill>
+                <a:latin typeface="Calibri" pitchFamily="34" charset="0"/>
+                <a:ea typeface="Calibri" pitchFamily="34" charset="-122"/>
+                <a:cs typeface="Calibri" pitchFamily="34" charset="-120"/>
+              </a:rPr>
+              <a:t>DA UTILIZZARE OGGI</a:t>
+            </a:r>
+            <a:pPr indent="0" marL="0">
+              <a:buNone/>
+            </a:pPr>
+            <a:r>
+              <a:rPr lang="en-US" sz="1100" dirty="0">
+                <a:solidFill>
+                  <a:srgbClr val="92400E"/>
+                </a:solidFill>
+                <a:latin typeface="Calibri" pitchFamily="34" charset="0"/>
+                <a:ea typeface="Calibri" pitchFamily="34" charset="-122"/>
+                <a:cs typeface="Calibri" pitchFamily="34" charset="-120"/>
+              </a:rPr>
+              <a:t> · gli strumenti di PRG32</a:t>
             </a:r>
             <a:endParaRPr lang="en-US" sz="1100" dirty="0"/>
           </a:p>
@@ -9878,6 +11207,158 @@
       </p:graphicFrame>
       <p:sp>
         <p:nvSpPr>
+          <p:cNvPr id="4" name="Shape 1"/>
+          <p:cNvSpPr/>
+          <p:nvPr/>
+        </p:nvSpPr>
+        <p:spPr>
+          <a:xfrm>
+            <a:off x="7875600" y="91440"/>
+            <a:ext cx="3767455" cy="274320"/>
+          </a:xfrm>
+          <a:prstGeom prst="rect">
+            <a:avLst/>
+          </a:prstGeom>
+          <a:solidFill>
+            <a:srgbClr val="FEF3C7"/>
+          </a:solidFill>
+          <a:ln w="12700">
+            <a:solidFill>
+              <a:srgbClr val="B45309"/>
+            </a:solidFill>
+            <a:prstDash val="solid"/>
+          </a:ln>
+        </p:spPr>
+      </p:sp>
+      <p:sp>
+        <p:nvSpPr>
+          <p:cNvPr id="5" name="Shape 2"/>
+          <p:cNvSpPr/>
+          <p:nvPr/>
+        </p:nvSpPr>
+        <p:spPr>
+          <a:xfrm>
+            <a:off x="7875600" y="91440"/>
+            <a:ext cx="27432" cy="274320"/>
+          </a:xfrm>
+          <a:prstGeom prst="rect">
+            <a:avLst/>
+          </a:prstGeom>
+          <a:solidFill>
+            <a:srgbClr val="B45309"/>
+          </a:solidFill>
+          <a:ln w="12700">
+            <a:solidFill>
+              <a:srgbClr val="B45309"/>
+            </a:solidFill>
+            <a:prstDash val="solid"/>
+          </a:ln>
+        </p:spPr>
+      </p:sp>
+      <p:sp>
+        <p:nvSpPr>
+          <p:cNvPr id="6" name="Shape 3"/>
+          <p:cNvSpPr/>
+          <p:nvPr/>
+        </p:nvSpPr>
+        <p:spPr>
+          <a:xfrm>
+            <a:off x="7930464" y="91440"/>
+            <a:ext cx="27432" cy="274320"/>
+          </a:xfrm>
+          <a:prstGeom prst="rect">
+            <a:avLst/>
+          </a:prstGeom>
+          <a:solidFill>
+            <a:srgbClr val="B45309"/>
+          </a:solidFill>
+          <a:ln w="12700">
+            <a:solidFill>
+              <a:srgbClr val="B45309"/>
+            </a:solidFill>
+            <a:prstDash val="solid"/>
+          </a:ln>
+        </p:spPr>
+      </p:sp>
+      <p:pic>
+        <p:nvPicPr>
+          <p:cNvPr id="7" name="Image 0" descr="preencoded.png">    </p:cNvPr>
+          <p:cNvPicPr>
+            <a:picLocks noChangeAspect="1"/>
+          </p:cNvPicPr>
+          <p:nvPr/>
+        </p:nvPicPr>
+        <p:blipFill>
+          <a:blip r:embed="rId1"/>
+          <a:stretch>
+            <a:fillRect/>
+          </a:stretch>
+        </p:blipFill>
+        <p:spPr>
+          <a:xfrm>
+            <a:off x="8003616" y="128016"/>
+            <a:ext cx="201168" cy="201168"/>
+          </a:xfrm>
+          <a:prstGeom prst="rect">
+            <a:avLst/>
+          </a:prstGeom>
+        </p:spPr>
+      </p:pic>
+      <p:sp>
+        <p:nvSpPr>
+          <p:cNvPr id="8" name="Text 4"/>
+          <p:cNvSpPr txBox="1"/>
+          <p:nvPr/>
+        </p:nvSpPr>
+        <p:spPr>
+          <a:xfrm>
+            <a:off x="8259648" y="91440"/>
+            <a:ext cx="3346831" cy="274320"/>
+          </a:xfrm>
+          <a:prstGeom prst="rect">
+            <a:avLst/>
+          </a:prstGeom>
+          <a:noFill/>
+          <a:ln/>
+        </p:spPr>
+        <p:txBody>
+          <a:bodyPr wrap="square" lIns="0" tIns="0" rIns="0" bIns="0" rtlCol="0" anchor="ctr"/>
+          <a:lstStyle/>
+          <a:p>
+            <a:pPr indent="0" marL="0">
+              <a:buNone/>
+            </a:pPr>
+            <a:r>
+              <a:rPr lang="en-US" sz="1100" b="1" dirty="0">
+                <a:solidFill>
+                  <a:srgbClr val="92400E"/>
+                </a:solidFill>
+                <a:latin typeface="Calibri" pitchFamily="34" charset="0"/>
+                <a:ea typeface="Calibri" pitchFamily="34" charset="-122"/>
+                <a:cs typeface="Calibri" pitchFamily="34" charset="-120"/>
+              </a:rPr>
+              <a:t>DA UTILIZZARE OGGI</a:t>
+            </a:r>
+            <a:pPr indent="0" marL="0">
+              <a:buNone/>
+            </a:pPr>
+            <a:r>
+              <a:rPr lang="en-US" sz="1100" dirty="0">
+                <a:solidFill>
+                  <a:srgbClr val="92400E"/>
+                </a:solidFill>
+                <a:latin typeface="Calibri" pitchFamily="34" charset="0"/>
+                <a:ea typeface="Calibri" pitchFamily="34" charset="-122"/>
+                <a:cs typeface="Calibri" pitchFamily="34" charset="-120"/>
+              </a:rPr>
+              <a:t> · gli strumenti di PRG32</a:t>
+            </a:r>
+            <a:endParaRPr lang="en-US" sz="1100" dirty="0"/>
+          </a:p>
+        </p:txBody>
+      </p:sp>
+      <p:sp>
+        <p:nvSpPr>
           <p:cNvPr id="25" name="Slide Number Placeholder 0"/>
           <p:cNvSpPr>
             <a:spLocks noGrp="1"/>
@@ -11375,6 +12856,158 @@
       </p:sp>
       <p:sp>
         <p:nvSpPr>
+          <p:cNvPr id="5" name="Shape 3"/>
+          <p:cNvSpPr/>
+          <p:nvPr/>
+        </p:nvSpPr>
+        <p:spPr>
+          <a:xfrm>
+            <a:off x="7875600" y="91440"/>
+            <a:ext cx="3767455" cy="274320"/>
+          </a:xfrm>
+          <a:prstGeom prst="rect">
+            <a:avLst/>
+          </a:prstGeom>
+          <a:solidFill>
+            <a:srgbClr val="FEF3C7"/>
+          </a:solidFill>
+          <a:ln w="12700">
+            <a:solidFill>
+              <a:srgbClr val="B45309"/>
+            </a:solidFill>
+            <a:prstDash val="solid"/>
+          </a:ln>
+        </p:spPr>
+      </p:sp>
+      <p:sp>
+        <p:nvSpPr>
+          <p:cNvPr id="6" name="Shape 4"/>
+          <p:cNvSpPr/>
+          <p:nvPr/>
+        </p:nvSpPr>
+        <p:spPr>
+          <a:xfrm>
+            <a:off x="7875600" y="91440"/>
+            <a:ext cx="27432" cy="274320"/>
+          </a:xfrm>
+          <a:prstGeom prst="rect">
+            <a:avLst/>
+          </a:prstGeom>
+          <a:solidFill>
+            <a:srgbClr val="B45309"/>
+          </a:solidFill>
+          <a:ln w="12700">
+            <a:solidFill>
+              <a:srgbClr val="B45309"/>
+            </a:solidFill>
+            <a:prstDash val="solid"/>
+          </a:ln>
+        </p:spPr>
+      </p:sp>
+      <p:sp>
+        <p:nvSpPr>
+          <p:cNvPr id="7" name="Shape 5"/>
+          <p:cNvSpPr/>
+          <p:nvPr/>
+        </p:nvSpPr>
+        <p:spPr>
+          <a:xfrm>
+            <a:off x="7930464" y="91440"/>
+            <a:ext cx="27432" cy="274320"/>
+          </a:xfrm>
+          <a:prstGeom prst="rect">
+            <a:avLst/>
+          </a:prstGeom>
+          <a:solidFill>
+            <a:srgbClr val="B45309"/>
+          </a:solidFill>
+          <a:ln w="12700">
+            <a:solidFill>
+              <a:srgbClr val="B45309"/>
+            </a:solidFill>
+            <a:prstDash val="solid"/>
+          </a:ln>
+        </p:spPr>
+      </p:sp>
+      <p:pic>
+        <p:nvPicPr>
+          <p:cNvPr id="8" name="Image 0" descr="preencoded.png">    </p:cNvPr>
+          <p:cNvPicPr>
+            <a:picLocks noChangeAspect="1"/>
+          </p:cNvPicPr>
+          <p:nvPr/>
+        </p:nvPicPr>
+        <p:blipFill>
+          <a:blip r:embed="rId1"/>
+          <a:stretch>
+            <a:fillRect/>
+          </a:stretch>
+        </p:blipFill>
+        <p:spPr>
+          <a:xfrm>
+            <a:off x="8003616" y="128016"/>
+            <a:ext cx="201168" cy="201168"/>
+          </a:xfrm>
+          <a:prstGeom prst="rect">
+            <a:avLst/>
+          </a:prstGeom>
+        </p:spPr>
+      </p:pic>
+      <p:sp>
+        <p:nvSpPr>
+          <p:cNvPr id="9" name="Text 6"/>
+          <p:cNvSpPr txBox="1"/>
+          <p:nvPr/>
+        </p:nvSpPr>
+        <p:spPr>
+          <a:xfrm>
+            <a:off x="8259648" y="91440"/>
+            <a:ext cx="3346831" cy="274320"/>
+          </a:xfrm>
+          <a:prstGeom prst="rect">
+            <a:avLst/>
+          </a:prstGeom>
+          <a:noFill/>
+          <a:ln/>
+        </p:spPr>
+        <p:txBody>
+          <a:bodyPr wrap="square" lIns="0" tIns="0" rIns="0" bIns="0" rtlCol="0" anchor="ctr"/>
+          <a:lstStyle/>
+          <a:p>
+            <a:pPr indent="0" marL="0">
+              <a:buNone/>
+            </a:pPr>
+            <a:r>
+              <a:rPr lang="en-US" sz="1100" b="1" dirty="0">
+                <a:solidFill>
+                  <a:srgbClr val="92400E"/>
+                </a:solidFill>
+                <a:latin typeface="Calibri" pitchFamily="34" charset="0"/>
+                <a:ea typeface="Calibri" pitchFamily="34" charset="-122"/>
+                <a:cs typeface="Calibri" pitchFamily="34" charset="-120"/>
+              </a:rPr>
+              <a:t>DA UTILIZZARE OGGI</a:t>
+            </a:r>
+            <a:pPr indent="0" marL="0">
+              <a:buNone/>
+            </a:pPr>
+            <a:r>
+              <a:rPr lang="en-US" sz="1100" dirty="0">
+                <a:solidFill>
+                  <a:srgbClr val="92400E"/>
+                </a:solidFill>
+                <a:latin typeface="Calibri" pitchFamily="34" charset="0"/>
+                <a:ea typeface="Calibri" pitchFamily="34" charset="-122"/>
+                <a:cs typeface="Calibri" pitchFamily="34" charset="-120"/>
+              </a:rPr>
+              <a:t> · gli strumenti di PRG32</a:t>
+            </a:r>
+            <a:endParaRPr lang="en-US" sz="1100" dirty="0"/>
+          </a:p>
+        </p:txBody>
+      </p:sp>
+      <p:sp>
+        <p:nvSpPr>
           <p:cNvPr id="25" name="Slide Number Placeholder 0"/>
           <p:cNvSpPr>
             <a:spLocks noGrp="1"/>
@@ -12262,6 +13895,133 @@
       </p:sp>
       <p:sp>
         <p:nvSpPr>
+          <p:cNvPr id="17" name="Shape 15"/>
+          <p:cNvSpPr/>
+          <p:nvPr/>
+        </p:nvSpPr>
+        <p:spPr>
+          <a:xfrm>
+            <a:off x="7526350" y="91440"/>
+            <a:ext cx="4116705" cy="274320"/>
+          </a:xfrm>
+          <a:prstGeom prst="rect">
+            <a:avLst/>
+          </a:prstGeom>
+          <a:solidFill>
+            <a:srgbClr val="E0F2FE"/>
+          </a:solidFill>
+          <a:ln w="12700">
+            <a:solidFill>
+              <a:srgbClr val="0369A1"/>
+            </a:solidFill>
+            <a:prstDash val="solid"/>
+          </a:ln>
+        </p:spPr>
+      </p:sp>
+      <p:sp>
+        <p:nvSpPr>
+          <p:cNvPr id="18" name="Shape 16"/>
+          <p:cNvSpPr/>
+          <p:nvPr/>
+        </p:nvSpPr>
+        <p:spPr>
+          <a:xfrm>
+            <a:off x="7526350" y="91440"/>
+            <a:ext cx="73152" cy="274320"/>
+          </a:xfrm>
+          <a:prstGeom prst="rect">
+            <a:avLst/>
+          </a:prstGeom>
+          <a:solidFill>
+            <a:srgbClr val="0369A1"/>
+          </a:solidFill>
+          <a:ln w="12700">
+            <a:solidFill>
+              <a:srgbClr val="0369A1"/>
+            </a:solidFill>
+            <a:prstDash val="solid"/>
+          </a:ln>
+        </p:spPr>
+      </p:sp>
+      <p:pic>
+        <p:nvPicPr>
+          <p:cNvPr id="19" name="Image 0" descr="preencoded.png">    </p:cNvPr>
+          <p:cNvPicPr>
+            <a:picLocks noChangeAspect="1"/>
+          </p:cNvPicPr>
+          <p:nvPr/>
+        </p:nvPicPr>
+        <p:blipFill>
+          <a:blip r:embed="rId1"/>
+          <a:stretch>
+            <a:fillRect/>
+          </a:stretch>
+        </p:blipFill>
+        <p:spPr>
+          <a:xfrm>
+            <a:off x="7654366" y="128016"/>
+            <a:ext cx="201168" cy="201168"/>
+          </a:xfrm>
+          <a:prstGeom prst="rect">
+            <a:avLst/>
+          </a:prstGeom>
+        </p:spPr>
+      </p:pic>
+      <p:sp>
+        <p:nvSpPr>
+          <p:cNvPr id="20" name="Text 17"/>
+          <p:cNvSpPr txBox="1"/>
+          <p:nvPr/>
+        </p:nvSpPr>
+        <p:spPr>
+          <a:xfrm>
+            <a:off x="7910398" y="91440"/>
+            <a:ext cx="3696081" cy="274320"/>
+          </a:xfrm>
+          <a:prstGeom prst="rect">
+            <a:avLst/>
+          </a:prstGeom>
+          <a:noFill/>
+          <a:ln/>
+        </p:spPr>
+        <p:txBody>
+          <a:bodyPr wrap="square" lIns="0" tIns="0" rIns="0" bIns="0" rtlCol="0" anchor="ctr"/>
+          <a:lstStyle/>
+          <a:p>
+            <a:pPr indent="0" marL="0">
+              <a:buNone/>
+            </a:pPr>
+            <a:r>
+              <a:rPr lang="en-US" sz="1100" b="1" dirty="0">
+                <a:solidFill>
+                  <a:srgbClr val="075985"/>
+                </a:solidFill>
+                <a:latin typeface="Calibri" pitchFamily="34" charset="0"/>
+                <a:ea typeface="Calibri" pitchFamily="34" charset="-122"/>
+                <a:cs typeface="Calibri" pitchFamily="34" charset="-120"/>
+              </a:rPr>
+              <a:t>DA COMPRENDERE OGGI</a:t>
+            </a:r>
+            <a:pPr indent="0" marL="0">
+              <a:buNone/>
+            </a:pPr>
+            <a:r>
+              <a:rPr lang="en-US" sz="1100" dirty="0">
+                <a:solidFill>
+                  <a:srgbClr val="075985"/>
+                </a:solidFill>
+                <a:latin typeface="Calibri" pitchFamily="34" charset="0"/>
+                <a:ea typeface="Calibri" pitchFamily="34" charset="-122"/>
+                <a:cs typeface="Calibri" pitchFamily="34" charset="-120"/>
+              </a:rPr>
+              <a:t> · contratto init/update/draw</a:t>
+            </a:r>
+            <a:endParaRPr lang="en-US" sz="1100" dirty="0"/>
+          </a:p>
+        </p:txBody>
+      </p:sp>
+      <p:sp>
+        <p:nvSpPr>
           <p:cNvPr id="25" name="Slide Number Placeholder 0"/>
           <p:cNvSpPr>
             <a:spLocks noGrp="1"/>
@@ -13199,6 +14959,133 @@
       </p:sp>
       <p:sp>
         <p:nvSpPr>
+          <p:cNvPr id="17" name="Shape 15"/>
+          <p:cNvSpPr/>
+          <p:nvPr/>
+        </p:nvSpPr>
+        <p:spPr>
+          <a:xfrm>
+            <a:off x="7854645" y="91440"/>
+            <a:ext cx="3788410" cy="274320"/>
+          </a:xfrm>
+          <a:prstGeom prst="rect">
+            <a:avLst/>
+          </a:prstGeom>
+          <a:solidFill>
+            <a:srgbClr val="E0F2FE"/>
+          </a:solidFill>
+          <a:ln w="12700">
+            <a:solidFill>
+              <a:srgbClr val="0369A1"/>
+            </a:solidFill>
+            <a:prstDash val="solid"/>
+          </a:ln>
+        </p:spPr>
+      </p:sp>
+      <p:sp>
+        <p:nvSpPr>
+          <p:cNvPr id="18" name="Shape 16"/>
+          <p:cNvSpPr/>
+          <p:nvPr/>
+        </p:nvSpPr>
+        <p:spPr>
+          <a:xfrm>
+            <a:off x="7854645" y="91440"/>
+            <a:ext cx="73152" cy="274320"/>
+          </a:xfrm>
+          <a:prstGeom prst="rect">
+            <a:avLst/>
+          </a:prstGeom>
+          <a:solidFill>
+            <a:srgbClr val="0369A1"/>
+          </a:solidFill>
+          <a:ln w="12700">
+            <a:solidFill>
+              <a:srgbClr val="0369A1"/>
+            </a:solidFill>
+            <a:prstDash val="solid"/>
+          </a:ln>
+        </p:spPr>
+      </p:sp>
+      <p:pic>
+        <p:nvPicPr>
+          <p:cNvPr id="19" name="Image 0" descr="preencoded.png">    </p:cNvPr>
+          <p:cNvPicPr>
+            <a:picLocks noChangeAspect="1"/>
+          </p:cNvPicPr>
+          <p:nvPr/>
+        </p:nvPicPr>
+        <p:blipFill>
+          <a:blip r:embed="rId1"/>
+          <a:stretch>
+            <a:fillRect/>
+          </a:stretch>
+        </p:blipFill>
+        <p:spPr>
+          <a:xfrm>
+            <a:off x="7982661" y="128016"/>
+            <a:ext cx="201168" cy="201168"/>
+          </a:xfrm>
+          <a:prstGeom prst="rect">
+            <a:avLst/>
+          </a:prstGeom>
+        </p:spPr>
+      </p:pic>
+      <p:sp>
+        <p:nvSpPr>
+          <p:cNvPr id="20" name="Text 17"/>
+          <p:cNvSpPr txBox="1"/>
+          <p:nvPr/>
+        </p:nvSpPr>
+        <p:spPr>
+          <a:xfrm>
+            <a:off x="8238693" y="91440"/>
+            <a:ext cx="3367786" cy="274320"/>
+          </a:xfrm>
+          <a:prstGeom prst="rect">
+            <a:avLst/>
+          </a:prstGeom>
+          <a:noFill/>
+          <a:ln/>
+        </p:spPr>
+        <p:txBody>
+          <a:bodyPr wrap="square" lIns="0" tIns="0" rIns="0" bIns="0" rtlCol="0" anchor="ctr"/>
+          <a:lstStyle/>
+          <a:p>
+            <a:pPr indent="0" marL="0">
+              <a:buNone/>
+            </a:pPr>
+            <a:r>
+              <a:rPr lang="en-US" sz="1100" b="1" dirty="0">
+                <a:solidFill>
+                  <a:srgbClr val="075985"/>
+                </a:solidFill>
+                <a:latin typeface="Calibri" pitchFamily="34" charset="0"/>
+                <a:ea typeface="Calibri" pitchFamily="34" charset="-122"/>
+                <a:cs typeface="Calibri" pitchFamily="34" charset="-120"/>
+              </a:rPr>
+              <a:t>DA COMPRENDERE OGGI</a:t>
+            </a:r>
+            <a:pPr indent="0" marL="0">
+              <a:buNone/>
+            </a:pPr>
+            <a:r>
+              <a:rPr lang="en-US" sz="1100" dirty="0">
+                <a:solidFill>
+                  <a:srgbClr val="075985"/>
+                </a:solidFill>
+                <a:latin typeface="Calibri" pitchFamily="34" charset="0"/>
+                <a:ea typeface="Calibri" pitchFamily="34" charset="-122"/>
+                <a:cs typeface="Calibri" pitchFamily="34" charset="-120"/>
+              </a:rPr>
+              <a:t> · un colore è un numero</a:t>
+            </a:r>
+            <a:endParaRPr lang="en-US" sz="1100" dirty="0"/>
+          </a:p>
+        </p:txBody>
+      </p:sp>
+      <p:sp>
+        <p:nvSpPr>
           <p:cNvPr id="25" name="Slide Number Placeholder 0"/>
           <p:cNvSpPr>
             <a:spLocks noGrp="1"/>
@@ -13862,6 +15749,133 @@
       </p:sp>
       <p:sp>
         <p:nvSpPr>
+          <p:cNvPr id="14" name="Shape 12"/>
+          <p:cNvSpPr/>
+          <p:nvPr/>
+        </p:nvSpPr>
+        <p:spPr>
+          <a:xfrm>
+            <a:off x="7854645" y="91440"/>
+            <a:ext cx="3788410" cy="274320"/>
+          </a:xfrm>
+          <a:prstGeom prst="rect">
+            <a:avLst/>
+          </a:prstGeom>
+          <a:solidFill>
+            <a:srgbClr val="E0F2FE"/>
+          </a:solidFill>
+          <a:ln w="12700">
+            <a:solidFill>
+              <a:srgbClr val="0369A1"/>
+            </a:solidFill>
+            <a:prstDash val="solid"/>
+          </a:ln>
+        </p:spPr>
+      </p:sp>
+      <p:sp>
+        <p:nvSpPr>
+          <p:cNvPr id="15" name="Shape 13"/>
+          <p:cNvSpPr/>
+          <p:nvPr/>
+        </p:nvSpPr>
+        <p:spPr>
+          <a:xfrm>
+            <a:off x="7854645" y="91440"/>
+            <a:ext cx="73152" cy="274320"/>
+          </a:xfrm>
+          <a:prstGeom prst="rect">
+            <a:avLst/>
+          </a:prstGeom>
+          <a:solidFill>
+            <a:srgbClr val="0369A1"/>
+          </a:solidFill>
+          <a:ln w="12700">
+            <a:solidFill>
+              <a:srgbClr val="0369A1"/>
+            </a:solidFill>
+            <a:prstDash val="solid"/>
+          </a:ln>
+        </p:spPr>
+      </p:sp>
+      <p:pic>
+        <p:nvPicPr>
+          <p:cNvPr id="16" name="Image 0" descr="preencoded.png">    </p:cNvPr>
+          <p:cNvPicPr>
+            <a:picLocks noChangeAspect="1"/>
+          </p:cNvPicPr>
+          <p:nvPr/>
+        </p:nvPicPr>
+        <p:blipFill>
+          <a:blip r:embed="rId1"/>
+          <a:stretch>
+            <a:fillRect/>
+          </a:stretch>
+        </p:blipFill>
+        <p:spPr>
+          <a:xfrm>
+            <a:off x="7982661" y="128016"/>
+            <a:ext cx="201168" cy="201168"/>
+          </a:xfrm>
+          <a:prstGeom prst="rect">
+            <a:avLst/>
+          </a:prstGeom>
+        </p:spPr>
+      </p:pic>
+      <p:sp>
+        <p:nvSpPr>
+          <p:cNvPr id="17" name="Text 14"/>
+          <p:cNvSpPr txBox="1"/>
+          <p:nvPr/>
+        </p:nvSpPr>
+        <p:spPr>
+          <a:xfrm>
+            <a:off x="8238693" y="91440"/>
+            <a:ext cx="3367786" cy="274320"/>
+          </a:xfrm>
+          <a:prstGeom prst="rect">
+            <a:avLst/>
+          </a:prstGeom>
+          <a:noFill/>
+          <a:ln/>
+        </p:spPr>
+        <p:txBody>
+          <a:bodyPr wrap="square" lIns="0" tIns="0" rIns="0" bIns="0" rtlCol="0" anchor="ctr"/>
+          <a:lstStyle/>
+          <a:p>
+            <a:pPr indent="0" marL="0">
+              <a:buNone/>
+            </a:pPr>
+            <a:r>
+              <a:rPr lang="en-US" sz="1100" b="1" dirty="0">
+                <a:solidFill>
+                  <a:srgbClr val="075985"/>
+                </a:solidFill>
+                <a:latin typeface="Calibri" pitchFamily="34" charset="0"/>
+                <a:ea typeface="Calibri" pitchFamily="34" charset="-122"/>
+                <a:cs typeface="Calibri" pitchFamily="34" charset="-120"/>
+              </a:rPr>
+              <a:t>DA COMPRENDERE OGGI</a:t>
+            </a:r>
+            <a:pPr indent="0" marL="0">
+              <a:buNone/>
+            </a:pPr>
+            <a:r>
+              <a:rPr lang="en-US" sz="1100" dirty="0">
+                <a:solidFill>
+                  <a:srgbClr val="075985"/>
+                </a:solidFill>
+                <a:latin typeface="Calibri" pitchFamily="34" charset="0"/>
+                <a:ea typeface="Calibri" pitchFamily="34" charset="-122"/>
+                <a:cs typeface="Calibri" pitchFamily="34" charset="-120"/>
+              </a:rPr>
+              <a:t> · .text, .rodata, .data</a:t>
+            </a:r>
+            <a:endParaRPr lang="en-US" sz="1100" dirty="0"/>
+          </a:p>
+        </p:txBody>
+      </p:sp>
+      <p:sp>
+        <p:nvSpPr>
           <p:cNvPr id="25" name="Slide Number Placeholder 0"/>
           <p:cNvSpPr>
             <a:spLocks noGrp="1"/>
@@ -14689,6 +16703,133 @@
       </p:sp>
       <p:sp>
         <p:nvSpPr>
+          <p:cNvPr id="17" name="Shape 15"/>
+          <p:cNvSpPr/>
+          <p:nvPr/>
+        </p:nvSpPr>
+        <p:spPr>
+          <a:xfrm>
+            <a:off x="7263714" y="91440"/>
+            <a:ext cx="4379341" cy="274320"/>
+          </a:xfrm>
+          <a:prstGeom prst="rect">
+            <a:avLst/>
+          </a:prstGeom>
+          <a:solidFill>
+            <a:srgbClr val="E0F2FE"/>
+          </a:solidFill>
+          <a:ln w="12700">
+            <a:solidFill>
+              <a:srgbClr val="0369A1"/>
+            </a:solidFill>
+            <a:prstDash val="solid"/>
+          </a:ln>
+        </p:spPr>
+      </p:sp>
+      <p:sp>
+        <p:nvSpPr>
+          <p:cNvPr id="18" name="Shape 16"/>
+          <p:cNvSpPr/>
+          <p:nvPr/>
+        </p:nvSpPr>
+        <p:spPr>
+          <a:xfrm>
+            <a:off x="7263714" y="91440"/>
+            <a:ext cx="73152" cy="274320"/>
+          </a:xfrm>
+          <a:prstGeom prst="rect">
+            <a:avLst/>
+          </a:prstGeom>
+          <a:solidFill>
+            <a:srgbClr val="0369A1"/>
+          </a:solidFill>
+          <a:ln w="12700">
+            <a:solidFill>
+              <a:srgbClr val="0369A1"/>
+            </a:solidFill>
+            <a:prstDash val="solid"/>
+          </a:ln>
+        </p:spPr>
+      </p:sp>
+      <p:pic>
+        <p:nvPicPr>
+          <p:cNvPr id="19" name="Image 0" descr="preencoded.png">    </p:cNvPr>
+          <p:cNvPicPr>
+            <a:picLocks noChangeAspect="1"/>
+          </p:cNvPicPr>
+          <p:nvPr/>
+        </p:nvPicPr>
+        <p:blipFill>
+          <a:blip r:embed="rId1"/>
+          <a:stretch>
+            <a:fillRect/>
+          </a:stretch>
+        </p:blipFill>
+        <p:spPr>
+          <a:xfrm>
+            <a:off x="7391730" y="128016"/>
+            <a:ext cx="201168" cy="201168"/>
+          </a:xfrm>
+          <a:prstGeom prst="rect">
+            <a:avLst/>
+          </a:prstGeom>
+        </p:spPr>
+      </p:pic>
+      <p:sp>
+        <p:nvSpPr>
+          <p:cNvPr id="20" name="Text 17"/>
+          <p:cNvSpPr txBox="1"/>
+          <p:nvPr/>
+        </p:nvSpPr>
+        <p:spPr>
+          <a:xfrm>
+            <a:off x="7647762" y="91440"/>
+            <a:ext cx="3958717" cy="274320"/>
+          </a:xfrm>
+          <a:prstGeom prst="rect">
+            <a:avLst/>
+          </a:prstGeom>
+          <a:noFill/>
+          <a:ln/>
+        </p:spPr>
+        <p:txBody>
+          <a:bodyPr wrap="square" lIns="0" tIns="0" rIns="0" bIns="0" rtlCol="0" anchor="ctr"/>
+          <a:lstStyle/>
+          <a:p>
+            <a:pPr indent="0" marL="0">
+              <a:buNone/>
+            </a:pPr>
+            <a:r>
+              <a:rPr lang="en-US" sz="1100" b="1" dirty="0">
+                <a:solidFill>
+                  <a:srgbClr val="075985"/>
+                </a:solidFill>
+                <a:latin typeface="Calibri" pitchFamily="34" charset="0"/>
+                <a:ea typeface="Calibri" pitchFamily="34" charset="-122"/>
+                <a:cs typeface="Calibri" pitchFamily="34" charset="-120"/>
+              </a:rPr>
+              <a:t>DA COMPRENDERE OGGI</a:t>
+            </a:r>
+            <a:pPr indent="0" marL="0">
+              <a:buNone/>
+            </a:pPr>
+            <a:r>
+              <a:rPr lang="en-US" sz="1100" dirty="0">
+                <a:solidFill>
+                  <a:srgbClr val="075985"/>
+                </a:solidFill>
+                <a:latin typeface="Calibri" pitchFamily="34" charset="0"/>
+                <a:ea typeface="Calibri" pitchFamily="34" charset="-122"/>
+                <a:cs typeface="Calibri" pitchFamily="34" charset="-120"/>
+              </a:rPr>
+              <a:t> · indirizzo, valore, load, store</a:t>
+            </a:r>
+            <a:endParaRPr lang="en-US" sz="1100" dirty="0"/>
+          </a:p>
+        </p:txBody>
+      </p:sp>
+      <p:sp>
+        <p:nvSpPr>
           <p:cNvPr id="25" name="Slide Number Placeholder 0"/>
           <p:cNvSpPr>
             <a:spLocks noGrp="1"/>
@@ -15822,6 +17963,133 @@
               <a:t>draw fa delle chiamate, quindi salva ra in un frame di stack</a:t>
             </a:r>
             <a:endParaRPr lang="en-US" sz="1200" dirty="0"/>
+          </a:p>
+        </p:txBody>
+      </p:sp>
+      <p:sp>
+        <p:nvSpPr>
+          <p:cNvPr id="17" name="Shape 15"/>
+          <p:cNvSpPr/>
+          <p:nvPr/>
+        </p:nvSpPr>
+        <p:spPr>
+          <a:xfrm>
+            <a:off x="8051622" y="91440"/>
+            <a:ext cx="3591433" cy="274320"/>
+          </a:xfrm>
+          <a:prstGeom prst="rect">
+            <a:avLst/>
+          </a:prstGeom>
+          <a:solidFill>
+            <a:srgbClr val="E0F2FE"/>
+          </a:solidFill>
+          <a:ln w="12700">
+            <a:solidFill>
+              <a:srgbClr val="0369A1"/>
+            </a:solidFill>
+            <a:prstDash val="solid"/>
+          </a:ln>
+        </p:spPr>
+      </p:sp>
+      <p:sp>
+        <p:nvSpPr>
+          <p:cNvPr id="18" name="Shape 16"/>
+          <p:cNvSpPr/>
+          <p:nvPr/>
+        </p:nvSpPr>
+        <p:spPr>
+          <a:xfrm>
+            <a:off x="8051622" y="91440"/>
+            <a:ext cx="73152" cy="274320"/>
+          </a:xfrm>
+          <a:prstGeom prst="rect">
+            <a:avLst/>
+          </a:prstGeom>
+          <a:solidFill>
+            <a:srgbClr val="0369A1"/>
+          </a:solidFill>
+          <a:ln w="12700">
+            <a:solidFill>
+              <a:srgbClr val="0369A1"/>
+            </a:solidFill>
+            <a:prstDash val="solid"/>
+          </a:ln>
+        </p:spPr>
+      </p:sp>
+      <p:pic>
+        <p:nvPicPr>
+          <p:cNvPr id="19" name="Image 0" descr="preencoded.png">    </p:cNvPr>
+          <p:cNvPicPr>
+            <a:picLocks noChangeAspect="1"/>
+          </p:cNvPicPr>
+          <p:nvPr/>
+        </p:nvPicPr>
+        <p:blipFill>
+          <a:blip r:embed="rId1"/>
+          <a:stretch>
+            <a:fillRect/>
+          </a:stretch>
+        </p:blipFill>
+        <p:spPr>
+          <a:xfrm>
+            <a:off x="8179638" y="128016"/>
+            <a:ext cx="201168" cy="201168"/>
+          </a:xfrm>
+          <a:prstGeom prst="rect">
+            <a:avLst/>
+          </a:prstGeom>
+        </p:spPr>
+      </p:pic>
+      <p:sp>
+        <p:nvSpPr>
+          <p:cNvPr id="20" name="Text 17"/>
+          <p:cNvSpPr txBox="1"/>
+          <p:nvPr/>
+        </p:nvSpPr>
+        <p:spPr>
+          <a:xfrm>
+            <a:off x="8435670" y="91440"/>
+            <a:ext cx="3170809" cy="274320"/>
+          </a:xfrm>
+          <a:prstGeom prst="rect">
+            <a:avLst/>
+          </a:prstGeom>
+          <a:noFill/>
+          <a:ln/>
+        </p:spPr>
+        <p:txBody>
+          <a:bodyPr wrap="square" lIns="0" tIns="0" rIns="0" bIns="0" rtlCol="0" anchor="ctr"/>
+          <a:lstStyle/>
+          <a:p>
+            <a:pPr indent="0" marL="0">
+              <a:buNone/>
+            </a:pPr>
+            <a:r>
+              <a:rPr lang="en-US" sz="1100" b="1" dirty="0">
+                <a:solidFill>
+                  <a:srgbClr val="075985"/>
+                </a:solidFill>
+                <a:latin typeface="Calibri" pitchFamily="34" charset="0"/>
+                <a:ea typeface="Calibri" pitchFamily="34" charset="-122"/>
+                <a:cs typeface="Calibri" pitchFamily="34" charset="-120"/>
+              </a:rPr>
+              <a:t>DA COMPRENDERE OGGI</a:t>
+            </a:r>
+            <a:pPr indent="0" marL="0">
+              <a:buNone/>
+            </a:pPr>
+            <a:r>
+              <a:rPr lang="en-US" sz="1100" dirty="0">
+                <a:solidFill>
+                  <a:srgbClr val="075985"/>
+                </a:solidFill>
+                <a:latin typeface="Calibri" pitchFamily="34" charset="0"/>
+                <a:ea typeface="Calibri" pitchFamily="34" charset="-122"/>
+                <a:cs typeface="Calibri" pitchFamily="34" charset="-120"/>
+              </a:rPr>
+              <a:t> · perché si salva ra</a:t>
+            </a:r>
+            <a:endParaRPr lang="en-US" sz="1100" dirty="0"/>
           </a:p>
         </p:txBody>
       </p:sp>

--- a/it/slides/07-Architettura_dei_Calcolatori-Verm1_Parte_1-Codice.pptx
+++ b/it/slides/07-Architettura_dei_Calcolatori-Verm1_Parte_1-Codice.pptx
@@ -124,19 +124,19 @@
   <p:extLst>
     <p:ext uri="{521415D9-36F7-43E2-AB2F-B90AF26B5E84}">
       <p14:sectionLst xmlns:p14="http://schemas.microsoft.com/office/powerpoint/2010/main">
-        <p14:section name="Apertura" id="{f1329aec-7d79-4ecf-519c-200cfb47562c}">
+        <p14:section name="Apertura" id="{25b63170-42a5-8753-e3e4-f4b5e79f0519}">
           <p14:sldIdLst>
             <p14:sldId id="256"/>
             <p14:sldId id="257"/>
           </p14:sldIdLst>
         </p14:section>
-        <p14:section name="Passo 0: il ciclo di lavoro" id="{5ad64092-96dd-c390-51f9-627f81469efe}">
+        <p14:section name="Passo 0: il ciclo di lavoro" id="{17d178f3-965b-93f3-4cd6-241871f6dabe}">
           <p14:sldIdLst>
             <p14:sldId id="258"/>
             <p14:sldId id="259"/>
           </p14:sldIdLst>
         </p14:section>
-        <p14:section name="Passo 2: una griglia e una testa" id="{2a922ae9-cd33-b17e-80cb-9b62f29b2a6b}">
+        <p14:section name="Passo 2: una griglia e una testa" id="{6def9727-19bd-edbc-0183-27de2779401c}">
           <p14:sldIdLst>
             <p14:sldId id="260"/>
             <p14:sldId id="261"/>
@@ -145,18 +145,18 @@
             <p14:sldId id="264"/>
           </p14:sldIdLst>
         </p14:section>
-        <p14:section name="Passo 3: il movimento" id="{e5b95d1d-f38a-c66f-5ded-5b0ddb129773}">
+        <p14:section name="Passo 3: il movimento" id="{07a9d540-be20-542b-c29c-ca26bf3f5bc1}">
           <p14:sldIdLst>
             <p14:sldId id="265"/>
             <p14:sldId id="266"/>
           </p14:sldIdLst>
         </p14:section>
-        <p14:section name="Passo 4: guardare dentro con PRG32-QT" id="{796ad78c-6628-a157-365e-70eabfe06084}">
+        <p14:section name="Passo 4: guardare dentro con PRG32-QT" id="{7be7c3a6-8d11-a075-e68b-05813449a72c}">
           <p14:sldIdLst>
             <p14:sldId id="267"/>
           </p14:sldIdLst>
         </p14:section>
-        <p14:section name="Eseguire e provare" id="{fcd2d4c4-fbaa-9207-7f35-88143e2d5f59}">
+        <p14:section name="Eseguire e provare" id="{7b0fa9b8-28d2-71cf-33bf-5be297aca70e}">
           <p14:sldIdLst>
             <p14:sldId id="268"/>
             <p14:sldId id="269"/>
@@ -165,7 +165,7 @@
             <p14:sldId id="272"/>
           </p14:sldIdLst>
         </p14:section>
-        <p14:section name="Esercizi" id="{2664d5f6-9f4f-4c33-7fe0-256c18e6ed2e}">
+        <p14:section name="Esercizi" id="{b9904a74-afeb-af91-b843-13ecee6890fc}">
           <p14:sldIdLst>
             <p14:sldId id="273"/>
           </p14:sldIdLst>
@@ -845,7 +845,7 @@
               <a:rPr lang="en-US" dirty="0"/>
               <a:t>Il debugger non mostra il vostro sorgente: mostra ciò che l'assemblatore ha prodotto. I nomi sono spariti: le etichette sono diventate indirizzi e SPEED_Q8 è diventato il numero 40. Le pseudo-istruzioni sono espanse: la è auipc seguita da addi, li è una addi da zero, ret è un salto a ra. Alcune istruzioni cominciano con c.: sono le forme compresse, a 16 bit, delle stesse istruzioni, la C di RV32IMAC. Riconoscere il proprio programma in questo listato è un'abilità che cresce con la pratica.
 DA COMPRENDERE OGGI: le pseudo-istruzioni. DA COMPRENDERE PIÙ AVANTI: formati delle istruzioni (si studia nella Lezione 19).
-Per il docente: Disassemblato di verm1_update da verm1/verm1_part1.S (objdump, rv32imac), abbreviato; gli scostamenti esatti dipendono dalla compilazione. Formati delle istruzioni e istruzioni compresse sono l'argomento della Lezione 19.</a:t>
+Per il docente: Disassemblato di verm1_update da verm1/verm1_part1.S (objdump, rv32imac), abbreviato; gli scostamenti esatti dipendono dalla compilazione. I formati delle istruzioni sono l'argomento della Lezione 19; le forme compresse vi sono solo nominate, e sono elencate nell'Appendice A del libro.</a:t>
             </a:r>
             <a:endParaRPr lang="en-US" dirty="0"/>
           </a:p>
